--- a/ゲーム科1年/00_前期/ゲームプログラミングⅡ/04_シューティングゲーム弾丸編.pptx
+++ b/ゲーム科1年/00_前期/ゲームプログラミングⅡ/04_シューティングゲーム弾丸編.pptx
@@ -6,6 +6,10 @@
   </p:sldMasterIdLst>
   <p:sldIdLst>
     <p:sldId id="256" r:id="rId2"/>
+    <p:sldId id="257" r:id="rId3"/>
+    <p:sldId id="258" r:id="rId4"/>
+    <p:sldId id="259" r:id="rId5"/>
+    <p:sldId id="260" r:id="rId6"/>
   </p:sldIdLst>
   <p:sldSz cx="12192000" cy="6858000"/>
   <p:notesSz cx="6858000" cy="9144000"/>
@@ -3698,6 +3702,619 @@
 </p:sld>
 </file>
 
+<file path=ppt/slides/slide2.xml><?xml version="1.0" encoding="utf-8"?>
+<p:sld xmlns:a="http://schemas.openxmlformats.org/drawingml/2006/main" xmlns:r="http://schemas.openxmlformats.org/officeDocument/2006/relationships" xmlns:p="http://schemas.openxmlformats.org/presentationml/2006/main">
+  <p:cSld>
+    <p:spTree>
+      <p:nvGrpSpPr>
+        <p:cNvPr id="1" name=""/>
+        <p:cNvGrpSpPr/>
+        <p:nvPr/>
+      </p:nvGrpSpPr>
+      <p:grpSpPr>
+        <a:xfrm>
+          <a:off x="0" y="0"/>
+          <a:ext cx="0" cy="0"/>
+          <a:chOff x="0" y="0"/>
+          <a:chExt cx="0" cy="0"/>
+        </a:xfrm>
+      </p:grpSpPr>
+      <p:sp>
+        <p:nvSpPr>
+          <p:cNvPr id="4" name="テキスト ボックス 3">
+            <a:extLst>
+              <a:ext uri="{FF2B5EF4-FFF2-40B4-BE49-F238E27FC236}">
+                <a16:creationId xmlns:a16="http://schemas.microsoft.com/office/drawing/2014/main" id="{5A13BF46-B8C5-48AA-8308-C9ECFF431A18}"/>
+              </a:ext>
+            </a:extLst>
+          </p:cNvPr>
+          <p:cNvSpPr txBox="1"/>
+          <p:nvPr/>
+        </p:nvSpPr>
+        <p:spPr>
+          <a:xfrm>
+            <a:off x="567542" y="491954"/>
+            <a:ext cx="1005403" cy="584775"/>
+          </a:xfrm>
+          <a:prstGeom prst="rect">
+            <a:avLst/>
+          </a:prstGeom>
+          <a:noFill/>
+        </p:spPr>
+        <p:txBody>
+          <a:bodyPr wrap="none" rtlCol="0">
+            <a:spAutoFit/>
+          </a:bodyPr>
+          <a:lstStyle/>
+          <a:p>
+            <a:r>
+              <a:rPr kumimoji="1" lang="ja-JP" altLang="en-US" sz="3200" b="1" u="sng" dirty="0"/>
+              <a:t>弾丸</a:t>
+            </a:r>
+          </a:p>
+        </p:txBody>
+      </p:sp>
+      <p:sp>
+        <p:nvSpPr>
+          <p:cNvPr id="6" name="テキスト ボックス 5">
+            <a:extLst>
+              <a:ext uri="{FF2B5EF4-FFF2-40B4-BE49-F238E27FC236}">
+                <a16:creationId xmlns:a16="http://schemas.microsoft.com/office/drawing/2014/main" id="{55830AD6-028B-4C4E-80BF-B70DFC1C3A46}"/>
+              </a:ext>
+            </a:extLst>
+          </p:cNvPr>
+          <p:cNvSpPr txBox="1"/>
+          <p:nvPr/>
+        </p:nvSpPr>
+        <p:spPr>
+          <a:xfrm>
+            <a:off x="567542" y="1216429"/>
+            <a:ext cx="7571303" cy="3416320"/>
+          </a:xfrm>
+          <a:prstGeom prst="rect">
+            <a:avLst/>
+          </a:prstGeom>
+          <a:noFill/>
+        </p:spPr>
+        <p:txBody>
+          <a:bodyPr wrap="none" rtlCol="0">
+            <a:spAutoFit/>
+          </a:bodyPr>
+          <a:lstStyle/>
+          <a:p>
+            <a:r>
+              <a:rPr kumimoji="1" lang="ja-JP" altLang="en-US" sz="2400" dirty="0"/>
+              <a:t>弾丸にはさまざまな種類があります。たとえば、</a:t>
+            </a:r>
+            <a:endParaRPr kumimoji="1" lang="en-US" altLang="ja-JP" sz="2400" dirty="0"/>
+          </a:p>
+          <a:p>
+            <a:r>
+              <a:rPr lang="ja-JP" altLang="en-US" sz="2400" dirty="0"/>
+              <a:t>・貫通弾</a:t>
+            </a:r>
+            <a:endParaRPr lang="en-US" altLang="ja-JP" sz="2400" dirty="0"/>
+          </a:p>
+          <a:p>
+            <a:r>
+              <a:rPr lang="ja-JP" altLang="en-US" sz="2400" dirty="0"/>
+              <a:t>・ホーミング弾</a:t>
+            </a:r>
+            <a:endParaRPr lang="en-US" altLang="ja-JP" sz="2400" dirty="0"/>
+          </a:p>
+          <a:p>
+            <a:r>
+              <a:rPr lang="ja-JP" altLang="en-US" sz="2400" dirty="0"/>
+              <a:t>・炸裂弾</a:t>
+            </a:r>
+            <a:endParaRPr lang="en-US" altLang="ja-JP" sz="2400" dirty="0"/>
+          </a:p>
+          <a:p>
+            <a:r>
+              <a:rPr lang="ja-JP" altLang="en-US" sz="2400" dirty="0"/>
+              <a:t>・爆弾</a:t>
+            </a:r>
+            <a:endParaRPr lang="en-US" altLang="ja-JP" sz="2400" dirty="0"/>
+          </a:p>
+          <a:p>
+            <a:r>
+              <a:rPr lang="ja-JP" altLang="en-US" sz="2400" dirty="0"/>
+              <a:t>など</a:t>
+            </a:r>
+            <a:endParaRPr lang="en-US" altLang="ja-JP" sz="2400" dirty="0"/>
+          </a:p>
+          <a:p>
+            <a:endParaRPr lang="en-US" altLang="ja-JP" sz="2400" dirty="0"/>
+          </a:p>
+          <a:p>
+            <a:r>
+              <a:rPr lang="ja-JP" altLang="en-US" sz="2400" dirty="0"/>
+              <a:t>このように</a:t>
+            </a:r>
+            <a:r>
+              <a:rPr lang="ja-JP" altLang="en-US" sz="2400" b="1" dirty="0">
+                <a:solidFill>
+                  <a:srgbClr val="FF0000"/>
+                </a:solidFill>
+              </a:rPr>
+              <a:t>複数の種類が予想されるもの</a:t>
+            </a:r>
+            <a:r>
+              <a:rPr lang="ja-JP" altLang="en-US" sz="2400" dirty="0"/>
+              <a:t>に関しては、</a:t>
+            </a:r>
+            <a:endParaRPr lang="en-US" altLang="ja-JP" sz="2400" dirty="0"/>
+          </a:p>
+          <a:p>
+            <a:r>
+              <a:rPr lang="ja-JP" altLang="en-US" sz="2400" b="1" dirty="0">
+                <a:solidFill>
+                  <a:srgbClr val="FF0000"/>
+                </a:solidFill>
+              </a:rPr>
+              <a:t>それらをまとめて管理するプログラム</a:t>
+            </a:r>
+            <a:r>
+              <a:rPr lang="ja-JP" altLang="en-US" sz="2400" dirty="0"/>
+              <a:t>が必要です。</a:t>
+            </a:r>
+            <a:endParaRPr lang="en-US" altLang="ja-JP" sz="2400" dirty="0"/>
+          </a:p>
+        </p:txBody>
+      </p:sp>
+    </p:spTree>
+    <p:extLst>
+      <p:ext uri="{BB962C8B-B14F-4D97-AF65-F5344CB8AC3E}">
+        <p14:creationId xmlns:p14="http://schemas.microsoft.com/office/powerpoint/2010/main" val="3226428861"/>
+      </p:ext>
+    </p:extLst>
+  </p:cSld>
+  <p:clrMapOvr>
+    <a:masterClrMapping/>
+  </p:clrMapOvr>
+</p:sld>
+</file>
+
+<file path=ppt/slides/slide3.xml><?xml version="1.0" encoding="utf-8"?>
+<p:sld xmlns:a="http://schemas.openxmlformats.org/drawingml/2006/main" xmlns:r="http://schemas.openxmlformats.org/officeDocument/2006/relationships" xmlns:p="http://schemas.openxmlformats.org/presentationml/2006/main">
+  <p:cSld>
+    <p:spTree>
+      <p:nvGrpSpPr>
+        <p:cNvPr id="1" name=""/>
+        <p:cNvGrpSpPr/>
+        <p:nvPr/>
+      </p:nvGrpSpPr>
+      <p:grpSpPr>
+        <a:xfrm>
+          <a:off x="0" y="0"/>
+          <a:ext cx="0" cy="0"/>
+          <a:chOff x="0" y="0"/>
+          <a:chExt cx="0" cy="0"/>
+        </a:xfrm>
+      </p:grpSpPr>
+      <p:sp>
+        <p:nvSpPr>
+          <p:cNvPr id="4" name="テキスト ボックス 3">
+            <a:extLst>
+              <a:ext uri="{FF2B5EF4-FFF2-40B4-BE49-F238E27FC236}">
+                <a16:creationId xmlns:a16="http://schemas.microsoft.com/office/drawing/2014/main" id="{5A13BF46-B8C5-48AA-8308-C9ECFF431A18}"/>
+              </a:ext>
+            </a:extLst>
+          </p:cNvPr>
+          <p:cNvSpPr txBox="1"/>
+          <p:nvPr/>
+        </p:nvSpPr>
+        <p:spPr>
+          <a:xfrm>
+            <a:off x="567542" y="491954"/>
+            <a:ext cx="1005403" cy="584775"/>
+          </a:xfrm>
+          <a:prstGeom prst="rect">
+            <a:avLst/>
+          </a:prstGeom>
+          <a:noFill/>
+        </p:spPr>
+        <p:txBody>
+          <a:bodyPr wrap="none" rtlCol="0">
+            <a:spAutoFit/>
+          </a:bodyPr>
+          <a:lstStyle/>
+          <a:p>
+            <a:r>
+              <a:rPr kumimoji="1" lang="ja-JP" altLang="en-US" sz="3200" b="1" u="sng" dirty="0"/>
+              <a:t>弾丸</a:t>
+            </a:r>
+          </a:p>
+        </p:txBody>
+      </p:sp>
+      <p:sp>
+        <p:nvSpPr>
+          <p:cNvPr id="6" name="テキスト ボックス 5">
+            <a:extLst>
+              <a:ext uri="{FF2B5EF4-FFF2-40B4-BE49-F238E27FC236}">
+                <a16:creationId xmlns:a16="http://schemas.microsoft.com/office/drawing/2014/main" id="{55830AD6-028B-4C4E-80BF-B70DFC1C3A46}"/>
+              </a:ext>
+            </a:extLst>
+          </p:cNvPr>
+          <p:cNvSpPr txBox="1"/>
+          <p:nvPr/>
+        </p:nvSpPr>
+        <p:spPr>
+          <a:xfrm>
+            <a:off x="567542" y="1216429"/>
+            <a:ext cx="10055958" cy="830997"/>
+          </a:xfrm>
+          <a:prstGeom prst="rect">
+            <a:avLst/>
+          </a:prstGeom>
+          <a:noFill/>
+        </p:spPr>
+        <p:txBody>
+          <a:bodyPr wrap="none" rtlCol="0">
+            <a:spAutoFit/>
+          </a:bodyPr>
+          <a:lstStyle/>
+          <a:p>
+            <a:r>
+              <a:rPr kumimoji="1" lang="ja-JP" altLang="en-US" sz="2400" dirty="0"/>
+              <a:t>管理用のプログラムのことを</a:t>
+            </a:r>
+            <a:r>
+              <a:rPr kumimoji="1" lang="ja-JP" altLang="en-US" sz="2400" b="1" dirty="0">
+                <a:solidFill>
+                  <a:srgbClr val="FF0000"/>
+                </a:solidFill>
+              </a:rPr>
+              <a:t>マネージャープログラム</a:t>
+            </a:r>
+            <a:r>
+              <a:rPr kumimoji="1" lang="ja-JP" altLang="en-US" sz="2400" dirty="0"/>
+              <a:t>といいます。</a:t>
+            </a:r>
+            <a:endParaRPr kumimoji="1" lang="en-US" altLang="ja-JP" sz="2400" dirty="0"/>
+          </a:p>
+          <a:p>
+            <a:r>
+              <a:rPr lang="ja-JP" altLang="en-US" sz="2400" dirty="0"/>
+              <a:t>今回は弾丸のマネージャーから書いていきます。（</a:t>
+            </a:r>
+            <a:r>
+              <a:rPr lang="en-US" altLang="ja-JP" sz="2400" b="1" dirty="0" err="1">
+                <a:solidFill>
+                  <a:srgbClr val="FF0000"/>
+                </a:solidFill>
+              </a:rPr>
+              <a:t>BulletManager.h</a:t>
+            </a:r>
+            <a:r>
+              <a:rPr lang="ja-JP" altLang="en-US" sz="2400" dirty="0"/>
+              <a:t>）</a:t>
+            </a:r>
+            <a:endParaRPr lang="en-US" altLang="ja-JP" sz="2400" dirty="0"/>
+          </a:p>
+        </p:txBody>
+      </p:sp>
+      <p:pic>
+        <p:nvPicPr>
+          <p:cNvPr id="3" name="図 2">
+            <a:extLst>
+              <a:ext uri="{FF2B5EF4-FFF2-40B4-BE49-F238E27FC236}">
+                <a16:creationId xmlns:a16="http://schemas.microsoft.com/office/drawing/2014/main" id="{A0388A9E-3FF5-4A98-A0EE-89D8C9AAF97F}"/>
+              </a:ext>
+            </a:extLst>
+          </p:cNvPr>
+          <p:cNvPicPr>
+            <a:picLocks noChangeAspect="1"/>
+          </p:cNvPicPr>
+          <p:nvPr/>
+        </p:nvPicPr>
+        <p:blipFill>
+          <a:blip r:embed="rId2"/>
+          <a:stretch>
+            <a:fillRect/>
+          </a:stretch>
+        </p:blipFill>
+        <p:spPr>
+          <a:xfrm>
+            <a:off x="567542" y="2187126"/>
+            <a:ext cx="10936226" cy="2762636"/>
+          </a:xfrm>
+          <a:prstGeom prst="rect">
+            <a:avLst/>
+          </a:prstGeom>
+        </p:spPr>
+      </p:pic>
+    </p:spTree>
+    <p:extLst>
+      <p:ext uri="{BB962C8B-B14F-4D97-AF65-F5344CB8AC3E}">
+        <p14:creationId xmlns:p14="http://schemas.microsoft.com/office/powerpoint/2010/main" val="2401266571"/>
+      </p:ext>
+    </p:extLst>
+  </p:cSld>
+  <p:clrMapOvr>
+    <a:masterClrMapping/>
+  </p:clrMapOvr>
+</p:sld>
+</file>
+
+<file path=ppt/slides/slide4.xml><?xml version="1.0" encoding="utf-8"?>
+<p:sld xmlns:a="http://schemas.openxmlformats.org/drawingml/2006/main" xmlns:r="http://schemas.openxmlformats.org/officeDocument/2006/relationships" xmlns:p="http://schemas.openxmlformats.org/presentationml/2006/main">
+  <p:cSld>
+    <p:spTree>
+      <p:nvGrpSpPr>
+        <p:cNvPr id="1" name=""/>
+        <p:cNvGrpSpPr/>
+        <p:nvPr/>
+      </p:nvGrpSpPr>
+      <p:grpSpPr>
+        <a:xfrm>
+          <a:off x="0" y="0"/>
+          <a:ext cx="0" cy="0"/>
+          <a:chOff x="0" y="0"/>
+          <a:chExt cx="0" cy="0"/>
+        </a:xfrm>
+      </p:grpSpPr>
+      <p:sp>
+        <p:nvSpPr>
+          <p:cNvPr id="4" name="テキスト ボックス 3">
+            <a:extLst>
+              <a:ext uri="{FF2B5EF4-FFF2-40B4-BE49-F238E27FC236}">
+                <a16:creationId xmlns:a16="http://schemas.microsoft.com/office/drawing/2014/main" id="{5A13BF46-B8C5-48AA-8308-C9ECFF431A18}"/>
+              </a:ext>
+            </a:extLst>
+          </p:cNvPr>
+          <p:cNvSpPr txBox="1"/>
+          <p:nvPr/>
+        </p:nvSpPr>
+        <p:spPr>
+          <a:xfrm>
+            <a:off x="567542" y="491954"/>
+            <a:ext cx="1005403" cy="584775"/>
+          </a:xfrm>
+          <a:prstGeom prst="rect">
+            <a:avLst/>
+          </a:prstGeom>
+          <a:noFill/>
+        </p:spPr>
+        <p:txBody>
+          <a:bodyPr wrap="none" rtlCol="0">
+            <a:spAutoFit/>
+          </a:bodyPr>
+          <a:lstStyle/>
+          <a:p>
+            <a:r>
+              <a:rPr kumimoji="1" lang="ja-JP" altLang="en-US" sz="3200" b="1" u="sng" dirty="0"/>
+              <a:t>弾丸</a:t>
+            </a:r>
+          </a:p>
+        </p:txBody>
+      </p:sp>
+      <p:sp>
+        <p:nvSpPr>
+          <p:cNvPr id="6" name="テキスト ボックス 5">
+            <a:extLst>
+              <a:ext uri="{FF2B5EF4-FFF2-40B4-BE49-F238E27FC236}">
+                <a16:creationId xmlns:a16="http://schemas.microsoft.com/office/drawing/2014/main" id="{55830AD6-028B-4C4E-80BF-B70DFC1C3A46}"/>
+              </a:ext>
+            </a:extLst>
+          </p:cNvPr>
+          <p:cNvSpPr txBox="1"/>
+          <p:nvPr/>
+        </p:nvSpPr>
+        <p:spPr>
+          <a:xfrm>
+            <a:off x="567542" y="1216429"/>
+            <a:ext cx="9490098" cy="461665"/>
+          </a:xfrm>
+          <a:prstGeom prst="rect">
+            <a:avLst/>
+          </a:prstGeom>
+          <a:noFill/>
+        </p:spPr>
+        <p:txBody>
+          <a:bodyPr wrap="none" rtlCol="0">
+            <a:spAutoFit/>
+          </a:bodyPr>
+          <a:lstStyle/>
+          <a:p>
+            <a:r>
+              <a:rPr lang="en-US" altLang="ja-JP" sz="2400" b="1" dirty="0">
+                <a:solidFill>
+                  <a:srgbClr val="FF0000"/>
+                </a:solidFill>
+              </a:rPr>
+              <a:t>BulletManager.cpp</a:t>
+            </a:r>
+            <a:r>
+              <a:rPr lang="ja-JP" altLang="en-US" sz="2400" dirty="0"/>
+              <a:t>で、対応する関数を呼び出します。（その１）</a:t>
+            </a:r>
+            <a:endParaRPr lang="en-US" altLang="ja-JP" sz="2400" dirty="0"/>
+          </a:p>
+        </p:txBody>
+      </p:sp>
+      <p:pic>
+        <p:nvPicPr>
+          <p:cNvPr id="5" name="図 4">
+            <a:extLst>
+              <a:ext uri="{FF2B5EF4-FFF2-40B4-BE49-F238E27FC236}">
+                <a16:creationId xmlns:a16="http://schemas.microsoft.com/office/drawing/2014/main" id="{BAB32317-2C45-4564-99FC-90F8135444AF}"/>
+              </a:ext>
+            </a:extLst>
+          </p:cNvPr>
+          <p:cNvPicPr>
+            <a:picLocks noChangeAspect="1"/>
+          </p:cNvPicPr>
+          <p:nvPr/>
+        </p:nvPicPr>
+        <p:blipFill>
+          <a:blip r:embed="rId2"/>
+          <a:stretch>
+            <a:fillRect/>
+          </a:stretch>
+        </p:blipFill>
+        <p:spPr>
+          <a:xfrm>
+            <a:off x="567542" y="1817794"/>
+            <a:ext cx="3835125" cy="4570317"/>
+          </a:xfrm>
+          <a:prstGeom prst="rect">
+            <a:avLst/>
+          </a:prstGeom>
+        </p:spPr>
+      </p:pic>
+    </p:spTree>
+    <p:extLst>
+      <p:ext uri="{BB962C8B-B14F-4D97-AF65-F5344CB8AC3E}">
+        <p14:creationId xmlns:p14="http://schemas.microsoft.com/office/powerpoint/2010/main" val="830012435"/>
+      </p:ext>
+    </p:extLst>
+  </p:cSld>
+  <p:clrMapOvr>
+    <a:masterClrMapping/>
+  </p:clrMapOvr>
+</p:sld>
+</file>
+
+<file path=ppt/slides/slide5.xml><?xml version="1.0" encoding="utf-8"?>
+<p:sld xmlns:a="http://schemas.openxmlformats.org/drawingml/2006/main" xmlns:r="http://schemas.openxmlformats.org/officeDocument/2006/relationships" xmlns:p="http://schemas.openxmlformats.org/presentationml/2006/main">
+  <p:cSld>
+    <p:spTree>
+      <p:nvGrpSpPr>
+        <p:cNvPr id="1" name=""/>
+        <p:cNvGrpSpPr/>
+        <p:nvPr/>
+      </p:nvGrpSpPr>
+      <p:grpSpPr>
+        <a:xfrm>
+          <a:off x="0" y="0"/>
+          <a:ext cx="0" cy="0"/>
+          <a:chOff x="0" y="0"/>
+          <a:chExt cx="0" cy="0"/>
+        </a:xfrm>
+      </p:grpSpPr>
+      <p:sp>
+        <p:nvSpPr>
+          <p:cNvPr id="4" name="テキスト ボックス 3">
+            <a:extLst>
+              <a:ext uri="{FF2B5EF4-FFF2-40B4-BE49-F238E27FC236}">
+                <a16:creationId xmlns:a16="http://schemas.microsoft.com/office/drawing/2014/main" id="{5A13BF46-B8C5-48AA-8308-C9ECFF431A18}"/>
+              </a:ext>
+            </a:extLst>
+          </p:cNvPr>
+          <p:cNvSpPr txBox="1"/>
+          <p:nvPr/>
+        </p:nvSpPr>
+        <p:spPr>
+          <a:xfrm>
+            <a:off x="567542" y="491954"/>
+            <a:ext cx="1005403" cy="584775"/>
+          </a:xfrm>
+          <a:prstGeom prst="rect">
+            <a:avLst/>
+          </a:prstGeom>
+          <a:noFill/>
+        </p:spPr>
+        <p:txBody>
+          <a:bodyPr wrap="none" rtlCol="0">
+            <a:spAutoFit/>
+          </a:bodyPr>
+          <a:lstStyle/>
+          <a:p>
+            <a:r>
+              <a:rPr kumimoji="1" lang="ja-JP" altLang="en-US" sz="3200" b="1" u="sng" dirty="0"/>
+              <a:t>弾丸</a:t>
+            </a:r>
+          </a:p>
+        </p:txBody>
+      </p:sp>
+      <p:sp>
+        <p:nvSpPr>
+          <p:cNvPr id="6" name="テキスト ボックス 5">
+            <a:extLst>
+              <a:ext uri="{FF2B5EF4-FFF2-40B4-BE49-F238E27FC236}">
+                <a16:creationId xmlns:a16="http://schemas.microsoft.com/office/drawing/2014/main" id="{55830AD6-028B-4C4E-80BF-B70DFC1C3A46}"/>
+              </a:ext>
+            </a:extLst>
+          </p:cNvPr>
+          <p:cNvSpPr txBox="1"/>
+          <p:nvPr/>
+        </p:nvSpPr>
+        <p:spPr>
+          <a:xfrm>
+            <a:off x="567542" y="1216429"/>
+            <a:ext cx="9490098" cy="461665"/>
+          </a:xfrm>
+          <a:prstGeom prst="rect">
+            <a:avLst/>
+          </a:prstGeom>
+          <a:noFill/>
+        </p:spPr>
+        <p:txBody>
+          <a:bodyPr wrap="none" rtlCol="0">
+            <a:spAutoFit/>
+          </a:bodyPr>
+          <a:lstStyle/>
+          <a:p>
+            <a:r>
+              <a:rPr lang="en-US" altLang="ja-JP" sz="2400" b="1" dirty="0">
+                <a:solidFill>
+                  <a:srgbClr val="FF0000"/>
+                </a:solidFill>
+              </a:rPr>
+              <a:t>BulletManager.cpp</a:t>
+            </a:r>
+            <a:r>
+              <a:rPr lang="ja-JP" altLang="en-US" sz="2400" dirty="0"/>
+              <a:t>で、対応する関数を呼び出します。（その２）</a:t>
+            </a:r>
+            <a:endParaRPr lang="en-US" altLang="ja-JP" sz="2400" dirty="0"/>
+          </a:p>
+        </p:txBody>
+      </p:sp>
+      <p:pic>
+        <p:nvPicPr>
+          <p:cNvPr id="3" name="図 2">
+            <a:extLst>
+              <a:ext uri="{FF2B5EF4-FFF2-40B4-BE49-F238E27FC236}">
+                <a16:creationId xmlns:a16="http://schemas.microsoft.com/office/drawing/2014/main" id="{EAE06AFD-7917-44C6-A2EE-73C14C860393}"/>
+              </a:ext>
+            </a:extLst>
+          </p:cNvPr>
+          <p:cNvPicPr>
+            <a:picLocks noChangeAspect="1"/>
+          </p:cNvPicPr>
+          <p:nvPr/>
+        </p:nvPicPr>
+        <p:blipFill>
+          <a:blip r:embed="rId2"/>
+          <a:stretch>
+            <a:fillRect/>
+          </a:stretch>
+        </p:blipFill>
+        <p:spPr>
+          <a:xfrm>
+            <a:off x="567542" y="1817794"/>
+            <a:ext cx="3734321" cy="2562583"/>
+          </a:xfrm>
+          <a:prstGeom prst="rect">
+            <a:avLst/>
+          </a:prstGeom>
+        </p:spPr>
+      </p:pic>
+    </p:spTree>
+    <p:extLst>
+      <p:ext uri="{BB962C8B-B14F-4D97-AF65-F5344CB8AC3E}">
+        <p14:creationId xmlns:p14="http://schemas.microsoft.com/office/powerpoint/2010/main" val="2568313126"/>
+      </p:ext>
+    </p:extLst>
+  </p:cSld>
+  <p:clrMapOvr>
+    <a:masterClrMapping/>
+  </p:clrMapOvr>
+</p:sld>
+</file>
+
 <file path=ppt/theme/theme1.xml><?xml version="1.0" encoding="utf-8"?>
 <a:theme xmlns:a="http://schemas.openxmlformats.org/drawingml/2006/main" name="Office テーマ">
   <a:themeElements>

--- a/ゲーム科1年/00_前期/ゲームプログラミングⅡ/04_シューティングゲーム弾丸編.pptx
+++ b/ゲーム科1年/00_前期/ゲームプログラミングⅡ/04_シューティングゲーム弾丸編.pptx
@@ -10,6 +10,17 @@
     <p:sldId id="258" r:id="rId4"/>
     <p:sldId id="259" r:id="rId5"/>
     <p:sldId id="260" r:id="rId6"/>
+    <p:sldId id="261" r:id="rId7"/>
+    <p:sldId id="262" r:id="rId8"/>
+    <p:sldId id="263" r:id="rId9"/>
+    <p:sldId id="264" r:id="rId10"/>
+    <p:sldId id="265" r:id="rId11"/>
+    <p:sldId id="266" r:id="rId12"/>
+    <p:sldId id="267" r:id="rId13"/>
+    <p:sldId id="268" r:id="rId14"/>
+    <p:sldId id="269" r:id="rId15"/>
+    <p:sldId id="270" r:id="rId16"/>
+    <p:sldId id="271" r:id="rId17"/>
   </p:sldIdLst>
   <p:sldSz cx="12192000" cy="6858000"/>
   <p:notesSz cx="6858000" cy="9144000"/>
@@ -263,7 +274,7 @@
           <a:p>
             <a:fld id="{E9CC885B-4903-4D54-9A93-00025F12DED9}" type="datetimeFigureOut">
               <a:rPr kumimoji="1" lang="ja-JP" altLang="en-US" smtClean="0"/>
-              <a:t>2026/7/6</a:t>
+              <a:t>2026/7/7</a:t>
             </a:fld>
             <a:endParaRPr kumimoji="1" lang="ja-JP" altLang="en-US"/>
           </a:p>
@@ -493,7 +504,7 @@
           <a:p>
             <a:fld id="{E9CC885B-4903-4D54-9A93-00025F12DED9}" type="datetimeFigureOut">
               <a:rPr kumimoji="1" lang="ja-JP" altLang="en-US" smtClean="0"/>
-              <a:t>2026/7/6</a:t>
+              <a:t>2026/7/7</a:t>
             </a:fld>
             <a:endParaRPr kumimoji="1" lang="ja-JP" altLang="en-US"/>
           </a:p>
@@ -733,7 +744,7 @@
           <a:p>
             <a:fld id="{E9CC885B-4903-4D54-9A93-00025F12DED9}" type="datetimeFigureOut">
               <a:rPr kumimoji="1" lang="ja-JP" altLang="en-US" smtClean="0"/>
-              <a:t>2026/7/6</a:t>
+              <a:t>2026/7/7</a:t>
             </a:fld>
             <a:endParaRPr kumimoji="1" lang="ja-JP" altLang="en-US"/>
           </a:p>
@@ -963,7 +974,7 @@
           <a:p>
             <a:fld id="{E9CC885B-4903-4D54-9A93-00025F12DED9}" type="datetimeFigureOut">
               <a:rPr kumimoji="1" lang="ja-JP" altLang="en-US" smtClean="0"/>
-              <a:t>2026/7/6</a:t>
+              <a:t>2026/7/7</a:t>
             </a:fld>
             <a:endParaRPr kumimoji="1" lang="ja-JP" altLang="en-US"/>
           </a:p>
@@ -1238,7 +1249,7 @@
           <a:p>
             <a:fld id="{E9CC885B-4903-4D54-9A93-00025F12DED9}" type="datetimeFigureOut">
               <a:rPr kumimoji="1" lang="ja-JP" altLang="en-US" smtClean="0"/>
-              <a:t>2026/7/6</a:t>
+              <a:t>2026/7/7</a:t>
             </a:fld>
             <a:endParaRPr kumimoji="1" lang="ja-JP" altLang="en-US"/>
           </a:p>
@@ -1567,7 +1578,7 @@
           <a:p>
             <a:fld id="{E9CC885B-4903-4D54-9A93-00025F12DED9}" type="datetimeFigureOut">
               <a:rPr kumimoji="1" lang="ja-JP" altLang="en-US" smtClean="0"/>
-              <a:t>2026/7/6</a:t>
+              <a:t>2026/7/7</a:t>
             </a:fld>
             <a:endParaRPr kumimoji="1" lang="ja-JP" altLang="en-US"/>
           </a:p>
@@ -2043,7 +2054,7 @@
           <a:p>
             <a:fld id="{E9CC885B-4903-4D54-9A93-00025F12DED9}" type="datetimeFigureOut">
               <a:rPr kumimoji="1" lang="ja-JP" altLang="en-US" smtClean="0"/>
-              <a:t>2026/7/6</a:t>
+              <a:t>2026/7/7</a:t>
             </a:fld>
             <a:endParaRPr kumimoji="1" lang="ja-JP" altLang="en-US"/>
           </a:p>
@@ -2184,7 +2195,7 @@
           <a:p>
             <a:fld id="{E9CC885B-4903-4D54-9A93-00025F12DED9}" type="datetimeFigureOut">
               <a:rPr kumimoji="1" lang="ja-JP" altLang="en-US" smtClean="0"/>
-              <a:t>2026/7/6</a:t>
+              <a:t>2026/7/7</a:t>
             </a:fld>
             <a:endParaRPr kumimoji="1" lang="ja-JP" altLang="en-US"/>
           </a:p>
@@ -2297,7 +2308,7 @@
           <a:p>
             <a:fld id="{E9CC885B-4903-4D54-9A93-00025F12DED9}" type="datetimeFigureOut">
               <a:rPr kumimoji="1" lang="ja-JP" altLang="en-US" smtClean="0"/>
-              <a:t>2026/7/6</a:t>
+              <a:t>2026/7/7</a:t>
             </a:fld>
             <a:endParaRPr kumimoji="1" lang="ja-JP" altLang="en-US"/>
           </a:p>
@@ -2640,7 +2651,7 @@
           <a:p>
             <a:fld id="{E9CC885B-4903-4D54-9A93-00025F12DED9}" type="datetimeFigureOut">
               <a:rPr kumimoji="1" lang="ja-JP" altLang="en-US" smtClean="0"/>
-              <a:t>2026/7/6</a:t>
+              <a:t>2026/7/7</a:t>
             </a:fld>
             <a:endParaRPr kumimoji="1" lang="ja-JP" altLang="en-US"/>
           </a:p>
@@ -2928,7 +2939,7 @@
           <a:p>
             <a:fld id="{E9CC885B-4903-4D54-9A93-00025F12DED9}" type="datetimeFigureOut">
               <a:rPr kumimoji="1" lang="ja-JP" altLang="en-US" smtClean="0"/>
-              <a:t>2026/7/6</a:t>
+              <a:t>2026/7/7</a:t>
             </a:fld>
             <a:endParaRPr kumimoji="1" lang="ja-JP" altLang="en-US"/>
           </a:p>
@@ -3201,7 +3212,7 @@
           <a:p>
             <a:fld id="{E9CC885B-4903-4D54-9A93-00025F12DED9}" type="datetimeFigureOut">
               <a:rPr kumimoji="1" lang="ja-JP" altLang="en-US" smtClean="0"/>
-              <a:t>2026/7/6</a:t>
+              <a:t>2026/7/7</a:t>
             </a:fld>
             <a:endParaRPr kumimoji="1" lang="ja-JP" altLang="en-US"/>
           </a:p>
@@ -3702,6 +3713,1224 @@
 </p:sld>
 </file>
 
+<file path=ppt/slides/slide10.xml><?xml version="1.0" encoding="utf-8"?>
+<p:sld xmlns:a="http://schemas.openxmlformats.org/drawingml/2006/main" xmlns:r="http://schemas.openxmlformats.org/officeDocument/2006/relationships" xmlns:p="http://schemas.openxmlformats.org/presentationml/2006/main">
+  <p:cSld>
+    <p:spTree>
+      <p:nvGrpSpPr>
+        <p:cNvPr id="1" name=""/>
+        <p:cNvGrpSpPr/>
+        <p:nvPr/>
+      </p:nvGrpSpPr>
+      <p:grpSpPr>
+        <a:xfrm>
+          <a:off x="0" y="0"/>
+          <a:ext cx="0" cy="0"/>
+          <a:chOff x="0" y="0"/>
+          <a:chExt cx="0" cy="0"/>
+        </a:xfrm>
+      </p:grpSpPr>
+      <p:sp>
+        <p:nvSpPr>
+          <p:cNvPr id="4" name="テキスト ボックス 3">
+            <a:extLst>
+              <a:ext uri="{FF2B5EF4-FFF2-40B4-BE49-F238E27FC236}">
+                <a16:creationId xmlns:a16="http://schemas.microsoft.com/office/drawing/2014/main" id="{5A13BF46-B8C5-48AA-8308-C9ECFF431A18}"/>
+              </a:ext>
+            </a:extLst>
+          </p:cNvPr>
+          <p:cNvSpPr txBox="1"/>
+          <p:nvPr/>
+        </p:nvSpPr>
+        <p:spPr>
+          <a:xfrm>
+            <a:off x="567542" y="491954"/>
+            <a:ext cx="1005403" cy="584775"/>
+          </a:xfrm>
+          <a:prstGeom prst="rect">
+            <a:avLst/>
+          </a:prstGeom>
+          <a:noFill/>
+        </p:spPr>
+        <p:txBody>
+          <a:bodyPr wrap="none" rtlCol="0">
+            <a:spAutoFit/>
+          </a:bodyPr>
+          <a:lstStyle/>
+          <a:p>
+            <a:r>
+              <a:rPr kumimoji="1" lang="ja-JP" altLang="en-US" sz="3200" b="1" u="sng" dirty="0"/>
+              <a:t>弾丸</a:t>
+            </a:r>
+          </a:p>
+        </p:txBody>
+      </p:sp>
+      <p:sp>
+        <p:nvSpPr>
+          <p:cNvPr id="6" name="テキスト ボックス 5">
+            <a:extLst>
+              <a:ext uri="{FF2B5EF4-FFF2-40B4-BE49-F238E27FC236}">
+                <a16:creationId xmlns:a16="http://schemas.microsoft.com/office/drawing/2014/main" id="{55830AD6-028B-4C4E-80BF-B70DFC1C3A46}"/>
+              </a:ext>
+            </a:extLst>
+          </p:cNvPr>
+          <p:cNvSpPr txBox="1"/>
+          <p:nvPr/>
+        </p:nvSpPr>
+        <p:spPr>
+          <a:xfrm>
+            <a:off x="567542" y="1216429"/>
+            <a:ext cx="5654112" cy="830997"/>
+          </a:xfrm>
+          <a:prstGeom prst="rect">
+            <a:avLst/>
+          </a:prstGeom>
+          <a:noFill/>
+        </p:spPr>
+        <p:txBody>
+          <a:bodyPr wrap="none" rtlCol="0">
+            <a:spAutoFit/>
+          </a:bodyPr>
+          <a:lstStyle/>
+          <a:p>
+            <a:r>
+              <a:rPr lang="ja-JP" altLang="en-US" sz="2400" dirty="0"/>
+              <a:t>弾丸には発射処理が必要です。</a:t>
+            </a:r>
+            <a:endParaRPr lang="en-US" altLang="ja-JP" sz="2400" dirty="0"/>
+          </a:p>
+          <a:p>
+            <a:r>
+              <a:rPr lang="en-US" altLang="ja-JP" sz="2400" b="1" dirty="0" err="1">
+                <a:solidFill>
+                  <a:srgbClr val="FF0000"/>
+                </a:solidFill>
+              </a:rPr>
+              <a:t>Bullet.h</a:t>
+            </a:r>
+            <a:r>
+              <a:rPr lang="ja-JP" altLang="en-US" sz="2400" dirty="0"/>
+              <a:t>に発射関数を宣言しましょう。</a:t>
+            </a:r>
+            <a:endParaRPr lang="en-US" altLang="ja-JP" sz="2400" dirty="0"/>
+          </a:p>
+        </p:txBody>
+      </p:sp>
+      <p:pic>
+        <p:nvPicPr>
+          <p:cNvPr id="5" name="図 4">
+            <a:extLst>
+              <a:ext uri="{FF2B5EF4-FFF2-40B4-BE49-F238E27FC236}">
+                <a16:creationId xmlns:a16="http://schemas.microsoft.com/office/drawing/2014/main" id="{36B7A288-1808-42E7-974B-7124E2827D55}"/>
+              </a:ext>
+            </a:extLst>
+          </p:cNvPr>
+          <p:cNvPicPr>
+            <a:picLocks noChangeAspect="1"/>
+          </p:cNvPicPr>
+          <p:nvPr/>
+        </p:nvPicPr>
+        <p:blipFill>
+          <a:blip r:embed="rId2"/>
+          <a:stretch>
+            <a:fillRect/>
+          </a:stretch>
+        </p:blipFill>
+        <p:spPr>
+          <a:xfrm>
+            <a:off x="567542" y="2187126"/>
+            <a:ext cx="10519826" cy="671688"/>
+          </a:xfrm>
+          <a:prstGeom prst="rect">
+            <a:avLst/>
+          </a:prstGeom>
+        </p:spPr>
+      </p:pic>
+    </p:spTree>
+    <p:extLst>
+      <p:ext uri="{BB962C8B-B14F-4D97-AF65-F5344CB8AC3E}">
+        <p14:creationId xmlns:p14="http://schemas.microsoft.com/office/powerpoint/2010/main" val="2100833526"/>
+      </p:ext>
+    </p:extLst>
+  </p:cSld>
+  <p:clrMapOvr>
+    <a:masterClrMapping/>
+  </p:clrMapOvr>
+</p:sld>
+</file>
+
+<file path=ppt/slides/slide11.xml><?xml version="1.0" encoding="utf-8"?>
+<p:sld xmlns:a="http://schemas.openxmlformats.org/drawingml/2006/main" xmlns:r="http://schemas.openxmlformats.org/officeDocument/2006/relationships" xmlns:p="http://schemas.openxmlformats.org/presentationml/2006/main">
+  <p:cSld>
+    <p:spTree>
+      <p:nvGrpSpPr>
+        <p:cNvPr id="1" name=""/>
+        <p:cNvGrpSpPr/>
+        <p:nvPr/>
+      </p:nvGrpSpPr>
+      <p:grpSpPr>
+        <a:xfrm>
+          <a:off x="0" y="0"/>
+          <a:ext cx="0" cy="0"/>
+          <a:chOff x="0" y="0"/>
+          <a:chExt cx="0" cy="0"/>
+        </a:xfrm>
+      </p:grpSpPr>
+      <p:sp>
+        <p:nvSpPr>
+          <p:cNvPr id="4" name="テキスト ボックス 3">
+            <a:extLst>
+              <a:ext uri="{FF2B5EF4-FFF2-40B4-BE49-F238E27FC236}">
+                <a16:creationId xmlns:a16="http://schemas.microsoft.com/office/drawing/2014/main" id="{5A13BF46-B8C5-48AA-8308-C9ECFF431A18}"/>
+              </a:ext>
+            </a:extLst>
+          </p:cNvPr>
+          <p:cNvSpPr txBox="1"/>
+          <p:nvPr/>
+        </p:nvSpPr>
+        <p:spPr>
+          <a:xfrm>
+            <a:off x="567542" y="491954"/>
+            <a:ext cx="1005403" cy="584775"/>
+          </a:xfrm>
+          <a:prstGeom prst="rect">
+            <a:avLst/>
+          </a:prstGeom>
+          <a:noFill/>
+        </p:spPr>
+        <p:txBody>
+          <a:bodyPr wrap="none" rtlCol="0">
+            <a:spAutoFit/>
+          </a:bodyPr>
+          <a:lstStyle/>
+          <a:p>
+            <a:r>
+              <a:rPr kumimoji="1" lang="ja-JP" altLang="en-US" sz="3200" b="1" u="sng" dirty="0"/>
+              <a:t>弾丸</a:t>
+            </a:r>
+          </a:p>
+        </p:txBody>
+      </p:sp>
+      <p:sp>
+        <p:nvSpPr>
+          <p:cNvPr id="6" name="テキスト ボックス 5">
+            <a:extLst>
+              <a:ext uri="{FF2B5EF4-FFF2-40B4-BE49-F238E27FC236}">
+                <a16:creationId xmlns:a16="http://schemas.microsoft.com/office/drawing/2014/main" id="{55830AD6-028B-4C4E-80BF-B70DFC1C3A46}"/>
+              </a:ext>
+            </a:extLst>
+          </p:cNvPr>
+          <p:cNvSpPr txBox="1"/>
+          <p:nvPr/>
+        </p:nvSpPr>
+        <p:spPr>
+          <a:xfrm>
+            <a:off x="567542" y="1216429"/>
+            <a:ext cx="8494633" cy="830997"/>
+          </a:xfrm>
+          <a:prstGeom prst="rect">
+            <a:avLst/>
+          </a:prstGeom>
+          <a:noFill/>
+        </p:spPr>
+        <p:txBody>
+          <a:bodyPr wrap="none" rtlCol="0">
+            <a:spAutoFit/>
+          </a:bodyPr>
+          <a:lstStyle/>
+          <a:p>
+            <a:r>
+              <a:rPr lang="ja-JP" altLang="en-US" sz="2400" dirty="0"/>
+              <a:t>発射処理は</a:t>
+            </a:r>
+            <a:r>
+              <a:rPr lang="ja-JP" altLang="en-US" sz="2400" b="1" dirty="0">
+                <a:solidFill>
+                  <a:srgbClr val="FF0000"/>
+                </a:solidFill>
+              </a:rPr>
+              <a:t>１発分</a:t>
+            </a:r>
+            <a:r>
+              <a:rPr lang="ja-JP" altLang="en-US" sz="2400" dirty="0"/>
+              <a:t>の発射処理を書きます。</a:t>
+            </a:r>
+            <a:endParaRPr lang="en-US" altLang="ja-JP" sz="2400" dirty="0"/>
+          </a:p>
+          <a:p>
+            <a:r>
+              <a:rPr lang="ja-JP" altLang="en-US" sz="2400" b="1" dirty="0">
+                <a:solidFill>
+                  <a:srgbClr val="FF0000"/>
+                </a:solidFill>
+              </a:rPr>
+              <a:t>配列の中から使われていない弾丸を探して発射</a:t>
+            </a:r>
+            <a:r>
+              <a:rPr lang="ja-JP" altLang="en-US" sz="2400" dirty="0"/>
+              <a:t>しましょう。</a:t>
+            </a:r>
+            <a:endParaRPr lang="en-US" altLang="ja-JP" sz="2400" dirty="0"/>
+          </a:p>
+        </p:txBody>
+      </p:sp>
+      <p:pic>
+        <p:nvPicPr>
+          <p:cNvPr id="3" name="図 2">
+            <a:extLst>
+              <a:ext uri="{FF2B5EF4-FFF2-40B4-BE49-F238E27FC236}">
+                <a16:creationId xmlns:a16="http://schemas.microsoft.com/office/drawing/2014/main" id="{5D048875-94CE-4C54-9CBA-DFA702AF1315}"/>
+              </a:ext>
+            </a:extLst>
+          </p:cNvPr>
+          <p:cNvPicPr>
+            <a:picLocks noChangeAspect="1"/>
+          </p:cNvPicPr>
+          <p:nvPr/>
+        </p:nvPicPr>
+        <p:blipFill>
+          <a:blip r:embed="rId2"/>
+          <a:stretch>
+            <a:fillRect/>
+          </a:stretch>
+        </p:blipFill>
+        <p:spPr>
+          <a:xfrm>
+            <a:off x="567543" y="2187126"/>
+            <a:ext cx="6138058" cy="4482851"/>
+          </a:xfrm>
+          <a:prstGeom prst="rect">
+            <a:avLst/>
+          </a:prstGeom>
+        </p:spPr>
+      </p:pic>
+    </p:spTree>
+    <p:extLst>
+      <p:ext uri="{BB962C8B-B14F-4D97-AF65-F5344CB8AC3E}">
+        <p14:creationId xmlns:p14="http://schemas.microsoft.com/office/powerpoint/2010/main" val="3120966364"/>
+      </p:ext>
+    </p:extLst>
+  </p:cSld>
+  <p:clrMapOvr>
+    <a:masterClrMapping/>
+  </p:clrMapOvr>
+</p:sld>
+</file>
+
+<file path=ppt/slides/slide12.xml><?xml version="1.0" encoding="utf-8"?>
+<p:sld xmlns:a="http://schemas.openxmlformats.org/drawingml/2006/main" xmlns:r="http://schemas.openxmlformats.org/officeDocument/2006/relationships" xmlns:p="http://schemas.openxmlformats.org/presentationml/2006/main">
+  <p:cSld>
+    <p:spTree>
+      <p:nvGrpSpPr>
+        <p:cNvPr id="1" name=""/>
+        <p:cNvGrpSpPr/>
+        <p:nvPr/>
+      </p:nvGrpSpPr>
+      <p:grpSpPr>
+        <a:xfrm>
+          <a:off x="0" y="0"/>
+          <a:ext cx="0" cy="0"/>
+          <a:chOff x="0" y="0"/>
+          <a:chExt cx="0" cy="0"/>
+        </a:xfrm>
+      </p:grpSpPr>
+      <p:sp>
+        <p:nvSpPr>
+          <p:cNvPr id="4" name="テキスト ボックス 3">
+            <a:extLst>
+              <a:ext uri="{FF2B5EF4-FFF2-40B4-BE49-F238E27FC236}">
+                <a16:creationId xmlns:a16="http://schemas.microsoft.com/office/drawing/2014/main" id="{5A13BF46-B8C5-48AA-8308-C9ECFF431A18}"/>
+              </a:ext>
+            </a:extLst>
+          </p:cNvPr>
+          <p:cNvSpPr txBox="1"/>
+          <p:nvPr/>
+        </p:nvSpPr>
+        <p:spPr>
+          <a:xfrm>
+            <a:off x="567542" y="491954"/>
+            <a:ext cx="1005403" cy="584775"/>
+          </a:xfrm>
+          <a:prstGeom prst="rect">
+            <a:avLst/>
+          </a:prstGeom>
+          <a:noFill/>
+        </p:spPr>
+        <p:txBody>
+          <a:bodyPr wrap="none" rtlCol="0">
+            <a:spAutoFit/>
+          </a:bodyPr>
+          <a:lstStyle/>
+          <a:p>
+            <a:r>
+              <a:rPr kumimoji="1" lang="ja-JP" altLang="en-US" sz="3200" b="1" u="sng" dirty="0"/>
+              <a:t>弾丸</a:t>
+            </a:r>
+          </a:p>
+        </p:txBody>
+      </p:sp>
+      <p:sp>
+        <p:nvSpPr>
+          <p:cNvPr id="6" name="テキスト ボックス 5">
+            <a:extLst>
+              <a:ext uri="{FF2B5EF4-FFF2-40B4-BE49-F238E27FC236}">
+                <a16:creationId xmlns:a16="http://schemas.microsoft.com/office/drawing/2014/main" id="{55830AD6-028B-4C4E-80BF-B70DFC1C3A46}"/>
+              </a:ext>
+            </a:extLst>
+          </p:cNvPr>
+          <p:cNvSpPr txBox="1"/>
+          <p:nvPr/>
+        </p:nvSpPr>
+        <p:spPr>
+          <a:xfrm>
+            <a:off x="567542" y="1216429"/>
+            <a:ext cx="8791189" cy="461665"/>
+          </a:xfrm>
+          <a:prstGeom prst="rect">
+            <a:avLst/>
+          </a:prstGeom>
+          <a:noFill/>
+        </p:spPr>
+        <p:txBody>
+          <a:bodyPr wrap="none" rtlCol="0">
+            <a:spAutoFit/>
+          </a:bodyPr>
+          <a:lstStyle/>
+          <a:p>
+            <a:r>
+              <a:rPr lang="ja-JP" altLang="en-US" sz="2400" dirty="0"/>
+              <a:t>最後に</a:t>
+            </a:r>
+            <a:r>
+              <a:rPr lang="en-US" altLang="ja-JP" sz="2400" b="1" dirty="0" err="1">
+                <a:solidFill>
+                  <a:srgbClr val="00B050"/>
+                </a:solidFill>
+              </a:rPr>
+              <a:t>BulletManager</a:t>
+            </a:r>
+            <a:r>
+              <a:rPr lang="ja-JP" altLang="en-US" sz="2400" dirty="0"/>
+              <a:t>の</a:t>
+            </a:r>
+            <a:r>
+              <a:rPr lang="en-US" altLang="ja-JP" sz="2400" b="1" dirty="0" err="1">
+                <a:solidFill>
+                  <a:srgbClr val="0070C0"/>
+                </a:solidFill>
+              </a:rPr>
+              <a:t>RequestFireBullet</a:t>
+            </a:r>
+            <a:r>
+              <a:rPr lang="ja-JP" altLang="en-US" sz="2400" b="1" dirty="0">
+                <a:solidFill>
+                  <a:srgbClr val="0070C0"/>
+                </a:solidFill>
+              </a:rPr>
+              <a:t>関数</a:t>
+            </a:r>
+            <a:r>
+              <a:rPr lang="ja-JP" altLang="en-US" sz="2400" dirty="0"/>
+              <a:t>を書きます。</a:t>
+            </a:r>
+            <a:endParaRPr lang="en-US" altLang="ja-JP" sz="2400" dirty="0"/>
+          </a:p>
+        </p:txBody>
+      </p:sp>
+      <p:pic>
+        <p:nvPicPr>
+          <p:cNvPr id="5" name="図 4">
+            <a:extLst>
+              <a:ext uri="{FF2B5EF4-FFF2-40B4-BE49-F238E27FC236}">
+                <a16:creationId xmlns:a16="http://schemas.microsoft.com/office/drawing/2014/main" id="{1F50AB52-471C-42BE-A82A-9E6A12E53863}"/>
+              </a:ext>
+            </a:extLst>
+          </p:cNvPr>
+          <p:cNvPicPr>
+            <a:picLocks noChangeAspect="1"/>
+          </p:cNvPicPr>
+          <p:nvPr/>
+        </p:nvPicPr>
+        <p:blipFill>
+          <a:blip r:embed="rId2"/>
+          <a:stretch>
+            <a:fillRect/>
+          </a:stretch>
+        </p:blipFill>
+        <p:spPr>
+          <a:xfrm>
+            <a:off x="567542" y="1817794"/>
+            <a:ext cx="10831437" cy="1571844"/>
+          </a:xfrm>
+          <a:prstGeom prst="rect">
+            <a:avLst/>
+          </a:prstGeom>
+        </p:spPr>
+      </p:pic>
+    </p:spTree>
+    <p:extLst>
+      <p:ext uri="{BB962C8B-B14F-4D97-AF65-F5344CB8AC3E}">
+        <p14:creationId xmlns:p14="http://schemas.microsoft.com/office/powerpoint/2010/main" val="3246851471"/>
+      </p:ext>
+    </p:extLst>
+  </p:cSld>
+  <p:clrMapOvr>
+    <a:masterClrMapping/>
+  </p:clrMapOvr>
+</p:sld>
+</file>
+
+<file path=ppt/slides/slide13.xml><?xml version="1.0" encoding="utf-8"?>
+<p:sld xmlns:a="http://schemas.openxmlformats.org/drawingml/2006/main" xmlns:r="http://schemas.openxmlformats.org/officeDocument/2006/relationships" xmlns:p="http://schemas.openxmlformats.org/presentationml/2006/main">
+  <p:cSld>
+    <p:spTree>
+      <p:nvGrpSpPr>
+        <p:cNvPr id="1" name=""/>
+        <p:cNvGrpSpPr/>
+        <p:nvPr/>
+      </p:nvGrpSpPr>
+      <p:grpSpPr>
+        <a:xfrm>
+          <a:off x="0" y="0"/>
+          <a:ext cx="0" cy="0"/>
+          <a:chOff x="0" y="0"/>
+          <a:chExt cx="0" cy="0"/>
+        </a:xfrm>
+      </p:grpSpPr>
+      <p:sp>
+        <p:nvSpPr>
+          <p:cNvPr id="4" name="テキスト ボックス 3">
+            <a:extLst>
+              <a:ext uri="{FF2B5EF4-FFF2-40B4-BE49-F238E27FC236}">
+                <a16:creationId xmlns:a16="http://schemas.microsoft.com/office/drawing/2014/main" id="{5A13BF46-B8C5-48AA-8308-C9ECFF431A18}"/>
+              </a:ext>
+            </a:extLst>
+          </p:cNvPr>
+          <p:cNvSpPr txBox="1"/>
+          <p:nvPr/>
+        </p:nvSpPr>
+        <p:spPr>
+          <a:xfrm>
+            <a:off x="567542" y="491954"/>
+            <a:ext cx="1005403" cy="584775"/>
+          </a:xfrm>
+          <a:prstGeom prst="rect">
+            <a:avLst/>
+          </a:prstGeom>
+          <a:noFill/>
+        </p:spPr>
+        <p:txBody>
+          <a:bodyPr wrap="none" rtlCol="0">
+            <a:spAutoFit/>
+          </a:bodyPr>
+          <a:lstStyle/>
+          <a:p>
+            <a:r>
+              <a:rPr kumimoji="1" lang="ja-JP" altLang="en-US" sz="3200" b="1" u="sng" dirty="0"/>
+              <a:t>弾丸</a:t>
+            </a:r>
+          </a:p>
+        </p:txBody>
+      </p:sp>
+      <p:sp>
+        <p:nvSpPr>
+          <p:cNvPr id="6" name="テキスト ボックス 5">
+            <a:extLst>
+              <a:ext uri="{FF2B5EF4-FFF2-40B4-BE49-F238E27FC236}">
+                <a16:creationId xmlns:a16="http://schemas.microsoft.com/office/drawing/2014/main" id="{55830AD6-028B-4C4E-80BF-B70DFC1C3A46}"/>
+              </a:ext>
+            </a:extLst>
+          </p:cNvPr>
+          <p:cNvSpPr txBox="1"/>
+          <p:nvPr/>
+        </p:nvSpPr>
+        <p:spPr>
+          <a:xfrm>
+            <a:off x="567542" y="1216429"/>
+            <a:ext cx="9969396" cy="830997"/>
+          </a:xfrm>
+          <a:prstGeom prst="rect">
+            <a:avLst/>
+          </a:prstGeom>
+          <a:noFill/>
+        </p:spPr>
+        <p:txBody>
+          <a:bodyPr wrap="none" rtlCol="0">
+            <a:spAutoFit/>
+          </a:bodyPr>
+          <a:lstStyle/>
+          <a:p>
+            <a:r>
+              <a:rPr lang="en-US" altLang="ja-JP" sz="2400" b="1" dirty="0">
+                <a:solidFill>
+                  <a:srgbClr val="FF0000"/>
+                </a:solidFill>
+              </a:rPr>
+              <a:t>Player.cpp</a:t>
+            </a:r>
+            <a:r>
+              <a:rPr lang="ja-JP" altLang="en-US" sz="2400" dirty="0"/>
+              <a:t>に発射処理が書かれています。</a:t>
+            </a:r>
+            <a:endParaRPr lang="en-US" altLang="ja-JP" sz="2400" dirty="0"/>
+          </a:p>
+          <a:p>
+            <a:r>
+              <a:rPr lang="ja-JP" altLang="en-US" sz="2400" dirty="0"/>
+              <a:t>このように</a:t>
+            </a:r>
+            <a:r>
+              <a:rPr lang="en-US" altLang="ja-JP" sz="2400" b="1" dirty="0" err="1">
+                <a:solidFill>
+                  <a:srgbClr val="0070C0"/>
+                </a:solidFill>
+              </a:rPr>
+              <a:t>RequestFireBullet</a:t>
+            </a:r>
+            <a:r>
+              <a:rPr lang="ja-JP" altLang="en-US" sz="2400" b="1" dirty="0">
+                <a:solidFill>
+                  <a:srgbClr val="0070C0"/>
+                </a:solidFill>
+              </a:rPr>
+              <a:t>関数</a:t>
+            </a:r>
+            <a:r>
+              <a:rPr lang="ja-JP" altLang="en-US" sz="2400" dirty="0"/>
+              <a:t>を呼ぶだけで弾丸が発射できます。</a:t>
+            </a:r>
+            <a:endParaRPr lang="en-US" altLang="ja-JP" sz="2400" dirty="0"/>
+          </a:p>
+        </p:txBody>
+      </p:sp>
+      <p:pic>
+        <p:nvPicPr>
+          <p:cNvPr id="3" name="図 2">
+            <a:extLst>
+              <a:ext uri="{FF2B5EF4-FFF2-40B4-BE49-F238E27FC236}">
+                <a16:creationId xmlns:a16="http://schemas.microsoft.com/office/drawing/2014/main" id="{4D90562C-7BC2-4F14-86C5-4E11D297DBFF}"/>
+              </a:ext>
+            </a:extLst>
+          </p:cNvPr>
+          <p:cNvPicPr>
+            <a:picLocks noChangeAspect="1"/>
+          </p:cNvPicPr>
+          <p:nvPr/>
+        </p:nvPicPr>
+        <p:blipFill>
+          <a:blip r:embed="rId2"/>
+          <a:stretch>
+            <a:fillRect/>
+          </a:stretch>
+        </p:blipFill>
+        <p:spPr>
+          <a:xfrm>
+            <a:off x="567542" y="2187126"/>
+            <a:ext cx="11095677" cy="3740708"/>
+          </a:xfrm>
+          <a:prstGeom prst="rect">
+            <a:avLst/>
+          </a:prstGeom>
+        </p:spPr>
+      </p:pic>
+    </p:spTree>
+    <p:extLst>
+      <p:ext uri="{BB962C8B-B14F-4D97-AF65-F5344CB8AC3E}">
+        <p14:creationId xmlns:p14="http://schemas.microsoft.com/office/powerpoint/2010/main" val="2449745985"/>
+      </p:ext>
+    </p:extLst>
+  </p:cSld>
+  <p:clrMapOvr>
+    <a:masterClrMapping/>
+  </p:clrMapOvr>
+</p:sld>
+</file>
+
+<file path=ppt/slides/slide14.xml><?xml version="1.0" encoding="utf-8"?>
+<p:sld xmlns:a="http://schemas.openxmlformats.org/drawingml/2006/main" xmlns:r="http://schemas.openxmlformats.org/officeDocument/2006/relationships" xmlns:p="http://schemas.openxmlformats.org/presentationml/2006/main">
+  <p:cSld>
+    <p:spTree>
+      <p:nvGrpSpPr>
+        <p:cNvPr id="1" name=""/>
+        <p:cNvGrpSpPr/>
+        <p:nvPr/>
+      </p:nvGrpSpPr>
+      <p:grpSpPr>
+        <a:xfrm>
+          <a:off x="0" y="0"/>
+          <a:ext cx="0" cy="0"/>
+          <a:chOff x="0" y="0"/>
+          <a:chExt cx="0" cy="0"/>
+        </a:xfrm>
+      </p:grpSpPr>
+      <p:sp>
+        <p:nvSpPr>
+          <p:cNvPr id="4" name="テキスト ボックス 3">
+            <a:extLst>
+              <a:ext uri="{FF2B5EF4-FFF2-40B4-BE49-F238E27FC236}">
+                <a16:creationId xmlns:a16="http://schemas.microsoft.com/office/drawing/2014/main" id="{5A13BF46-B8C5-48AA-8308-C9ECFF431A18}"/>
+              </a:ext>
+            </a:extLst>
+          </p:cNvPr>
+          <p:cNvSpPr txBox="1"/>
+          <p:nvPr/>
+        </p:nvSpPr>
+        <p:spPr>
+          <a:xfrm>
+            <a:off x="567542" y="491954"/>
+            <a:ext cx="1943161" cy="584775"/>
+          </a:xfrm>
+          <a:prstGeom prst="rect">
+            <a:avLst/>
+          </a:prstGeom>
+          <a:noFill/>
+        </p:spPr>
+        <p:txBody>
+          <a:bodyPr wrap="none" rtlCol="0">
+            <a:spAutoFit/>
+          </a:bodyPr>
+          <a:lstStyle/>
+          <a:p>
+            <a:r>
+              <a:rPr kumimoji="1" lang="ja-JP" altLang="en-US" sz="3200" b="1" u="sng" dirty="0"/>
+              <a:t>弾丸 補足</a:t>
+            </a:r>
+          </a:p>
+        </p:txBody>
+      </p:sp>
+      <p:sp>
+        <p:nvSpPr>
+          <p:cNvPr id="6" name="テキスト ボックス 5">
+            <a:extLst>
+              <a:ext uri="{FF2B5EF4-FFF2-40B4-BE49-F238E27FC236}">
+                <a16:creationId xmlns:a16="http://schemas.microsoft.com/office/drawing/2014/main" id="{55830AD6-028B-4C4E-80BF-B70DFC1C3A46}"/>
+              </a:ext>
+            </a:extLst>
+          </p:cNvPr>
+          <p:cNvSpPr txBox="1"/>
+          <p:nvPr/>
+        </p:nvSpPr>
+        <p:spPr>
+          <a:xfrm>
+            <a:off x="567542" y="1216429"/>
+            <a:ext cx="8239756" cy="830997"/>
+          </a:xfrm>
+          <a:prstGeom prst="rect">
+            <a:avLst/>
+          </a:prstGeom>
+          <a:noFill/>
+        </p:spPr>
+        <p:txBody>
+          <a:bodyPr wrap="none" rtlCol="0">
+            <a:spAutoFit/>
+          </a:bodyPr>
+          <a:lstStyle/>
+          <a:p>
+            <a:r>
+              <a:rPr lang="ja-JP" altLang="en-US" sz="2400" dirty="0"/>
+              <a:t>弾丸の種類を増やす場合は、</a:t>
+            </a:r>
+            <a:endParaRPr lang="en-US" altLang="ja-JP" sz="2400" dirty="0"/>
+          </a:p>
+          <a:p>
+            <a:r>
+              <a:rPr lang="en-US" altLang="ja-JP" sz="2400" b="1" dirty="0" err="1">
+                <a:solidFill>
+                  <a:srgbClr val="00B050"/>
+                </a:solidFill>
+              </a:rPr>
+              <a:t>BulletManager</a:t>
+            </a:r>
+            <a:r>
+              <a:rPr lang="ja-JP" altLang="en-US" sz="2400" dirty="0"/>
+              <a:t>でまとめて処理できるようにしましょう。</a:t>
+            </a:r>
+            <a:endParaRPr lang="en-US" altLang="ja-JP" sz="2400" dirty="0"/>
+          </a:p>
+        </p:txBody>
+      </p:sp>
+      <p:pic>
+        <p:nvPicPr>
+          <p:cNvPr id="5" name="図 4">
+            <a:extLst>
+              <a:ext uri="{FF2B5EF4-FFF2-40B4-BE49-F238E27FC236}">
+                <a16:creationId xmlns:a16="http://schemas.microsoft.com/office/drawing/2014/main" id="{39445E0A-C55A-40F2-89DF-41FC0C7B6A59}"/>
+              </a:ext>
+            </a:extLst>
+          </p:cNvPr>
+          <p:cNvPicPr>
+            <a:picLocks noChangeAspect="1"/>
+          </p:cNvPicPr>
+          <p:nvPr/>
+        </p:nvPicPr>
+        <p:blipFill>
+          <a:blip r:embed="rId2"/>
+          <a:stretch>
+            <a:fillRect/>
+          </a:stretch>
+        </p:blipFill>
+        <p:spPr>
+          <a:xfrm>
+            <a:off x="567541" y="2187126"/>
+            <a:ext cx="7018577" cy="2623449"/>
+          </a:xfrm>
+          <a:prstGeom prst="rect">
+            <a:avLst/>
+          </a:prstGeom>
+        </p:spPr>
+      </p:pic>
+      <p:sp>
+        <p:nvSpPr>
+          <p:cNvPr id="7" name="テキスト ボックス 6">
+            <a:extLst>
+              <a:ext uri="{FF2B5EF4-FFF2-40B4-BE49-F238E27FC236}">
+                <a16:creationId xmlns:a16="http://schemas.microsoft.com/office/drawing/2014/main" id="{1C75160D-8072-4124-8B44-9BB5B025D33E}"/>
+              </a:ext>
+            </a:extLst>
+          </p:cNvPr>
+          <p:cNvSpPr txBox="1"/>
+          <p:nvPr/>
+        </p:nvSpPr>
+        <p:spPr>
+          <a:xfrm>
+            <a:off x="567542" y="4950275"/>
+            <a:ext cx="6032421" cy="461665"/>
+          </a:xfrm>
+          <a:prstGeom prst="rect">
+            <a:avLst/>
+          </a:prstGeom>
+          <a:noFill/>
+        </p:spPr>
+        <p:txBody>
+          <a:bodyPr wrap="none" rtlCol="0">
+            <a:spAutoFit/>
+          </a:bodyPr>
+          <a:lstStyle/>
+          <a:p>
+            <a:r>
+              <a:rPr lang="ja-JP" altLang="en-US" sz="2400" dirty="0"/>
+              <a:t>他の関数もこうなるように</a:t>
+            </a:r>
+            <a:r>
+              <a:rPr lang="ja-JP" altLang="en-US" sz="2400"/>
+              <a:t>実装しましょう</a:t>
+            </a:r>
+            <a:endParaRPr lang="en-US" altLang="ja-JP" sz="2400" dirty="0"/>
+          </a:p>
+        </p:txBody>
+      </p:sp>
+    </p:spTree>
+    <p:extLst>
+      <p:ext uri="{BB962C8B-B14F-4D97-AF65-F5344CB8AC3E}">
+        <p14:creationId xmlns:p14="http://schemas.microsoft.com/office/powerpoint/2010/main" val="3909192007"/>
+      </p:ext>
+    </p:extLst>
+  </p:cSld>
+  <p:clrMapOvr>
+    <a:masterClrMapping/>
+  </p:clrMapOvr>
+</p:sld>
+</file>
+
+<file path=ppt/slides/slide15.xml><?xml version="1.0" encoding="utf-8"?>
+<p:sld xmlns:a="http://schemas.openxmlformats.org/drawingml/2006/main" xmlns:r="http://schemas.openxmlformats.org/officeDocument/2006/relationships" xmlns:p="http://schemas.openxmlformats.org/presentationml/2006/main">
+  <p:cSld>
+    <p:spTree>
+      <p:nvGrpSpPr>
+        <p:cNvPr id="1" name=""/>
+        <p:cNvGrpSpPr/>
+        <p:nvPr/>
+      </p:nvGrpSpPr>
+      <p:grpSpPr>
+        <a:xfrm>
+          <a:off x="0" y="0"/>
+          <a:ext cx="0" cy="0"/>
+          <a:chOff x="0" y="0"/>
+          <a:chExt cx="0" cy="0"/>
+        </a:xfrm>
+      </p:grpSpPr>
+      <p:sp>
+        <p:nvSpPr>
+          <p:cNvPr id="4" name="テキスト ボックス 3">
+            <a:extLst>
+              <a:ext uri="{FF2B5EF4-FFF2-40B4-BE49-F238E27FC236}">
+                <a16:creationId xmlns:a16="http://schemas.microsoft.com/office/drawing/2014/main" id="{5A13BF46-B8C5-48AA-8308-C9ECFF431A18}"/>
+              </a:ext>
+            </a:extLst>
+          </p:cNvPr>
+          <p:cNvSpPr txBox="1"/>
+          <p:nvPr/>
+        </p:nvSpPr>
+        <p:spPr>
+          <a:xfrm>
+            <a:off x="567542" y="491954"/>
+            <a:ext cx="1943161" cy="584775"/>
+          </a:xfrm>
+          <a:prstGeom prst="rect">
+            <a:avLst/>
+          </a:prstGeom>
+          <a:noFill/>
+        </p:spPr>
+        <p:txBody>
+          <a:bodyPr wrap="none" rtlCol="0">
+            <a:spAutoFit/>
+          </a:bodyPr>
+          <a:lstStyle/>
+          <a:p>
+            <a:r>
+              <a:rPr kumimoji="1" lang="ja-JP" altLang="en-US" sz="3200" b="1" u="sng" dirty="0"/>
+              <a:t>弾丸 補足</a:t>
+            </a:r>
+          </a:p>
+        </p:txBody>
+      </p:sp>
+      <p:sp>
+        <p:nvSpPr>
+          <p:cNvPr id="6" name="テキスト ボックス 5">
+            <a:extLst>
+              <a:ext uri="{FF2B5EF4-FFF2-40B4-BE49-F238E27FC236}">
+                <a16:creationId xmlns:a16="http://schemas.microsoft.com/office/drawing/2014/main" id="{55830AD6-028B-4C4E-80BF-B70DFC1C3A46}"/>
+              </a:ext>
+            </a:extLst>
+          </p:cNvPr>
+          <p:cNvSpPr txBox="1"/>
+          <p:nvPr/>
+        </p:nvSpPr>
+        <p:spPr>
+          <a:xfrm>
+            <a:off x="567542" y="1216429"/>
+            <a:ext cx="10033516" cy="830997"/>
+          </a:xfrm>
+          <a:prstGeom prst="rect">
+            <a:avLst/>
+          </a:prstGeom>
+          <a:noFill/>
+        </p:spPr>
+        <p:txBody>
+          <a:bodyPr wrap="none" rtlCol="0">
+            <a:spAutoFit/>
+          </a:bodyPr>
+          <a:lstStyle/>
+          <a:p>
+            <a:r>
+              <a:rPr lang="ja-JP" altLang="en-US" sz="2400" dirty="0"/>
+              <a:t>弾丸の種類が複数ある場合、</a:t>
+            </a:r>
+            <a:endParaRPr lang="en-US" altLang="ja-JP" sz="2400" dirty="0"/>
+          </a:p>
+          <a:p>
+            <a:r>
+              <a:rPr lang="ja-JP" altLang="en-US" sz="2400" b="1" dirty="0">
+                <a:solidFill>
+                  <a:srgbClr val="FF0000"/>
+                </a:solidFill>
+              </a:rPr>
+              <a:t>発射するときにどの弾丸を発射するかを指定する</a:t>
+            </a:r>
+            <a:r>
+              <a:rPr lang="ja-JP" altLang="en-US" sz="2400" dirty="0"/>
+              <a:t>ようにしましょう。</a:t>
+            </a:r>
+            <a:endParaRPr lang="en-US" altLang="ja-JP" sz="2400" dirty="0"/>
+          </a:p>
+        </p:txBody>
+      </p:sp>
+      <p:pic>
+        <p:nvPicPr>
+          <p:cNvPr id="3" name="図 2">
+            <a:extLst>
+              <a:ext uri="{FF2B5EF4-FFF2-40B4-BE49-F238E27FC236}">
+                <a16:creationId xmlns:a16="http://schemas.microsoft.com/office/drawing/2014/main" id="{B83ED0EE-78D2-4A81-8725-896CA0A509C6}"/>
+              </a:ext>
+            </a:extLst>
+          </p:cNvPr>
+          <p:cNvPicPr>
+            <a:picLocks noChangeAspect="1"/>
+          </p:cNvPicPr>
+          <p:nvPr/>
+        </p:nvPicPr>
+        <p:blipFill>
+          <a:blip r:embed="rId2"/>
+          <a:stretch>
+            <a:fillRect/>
+          </a:stretch>
+        </p:blipFill>
+        <p:spPr>
+          <a:xfrm>
+            <a:off x="567542" y="2187127"/>
+            <a:ext cx="11162003" cy="4033480"/>
+          </a:xfrm>
+          <a:prstGeom prst="rect">
+            <a:avLst/>
+          </a:prstGeom>
+        </p:spPr>
+      </p:pic>
+    </p:spTree>
+    <p:extLst>
+      <p:ext uri="{BB962C8B-B14F-4D97-AF65-F5344CB8AC3E}">
+        <p14:creationId xmlns:p14="http://schemas.microsoft.com/office/powerpoint/2010/main" val="1171984607"/>
+      </p:ext>
+    </p:extLst>
+  </p:cSld>
+  <p:clrMapOvr>
+    <a:masterClrMapping/>
+  </p:clrMapOvr>
+</p:sld>
+</file>
+
+<file path=ppt/slides/slide16.xml><?xml version="1.0" encoding="utf-8"?>
+<p:sld xmlns:a="http://schemas.openxmlformats.org/drawingml/2006/main" xmlns:r="http://schemas.openxmlformats.org/officeDocument/2006/relationships" xmlns:p="http://schemas.openxmlformats.org/presentationml/2006/main">
+  <p:cSld>
+    <p:spTree>
+      <p:nvGrpSpPr>
+        <p:cNvPr id="1" name=""/>
+        <p:cNvGrpSpPr/>
+        <p:nvPr/>
+      </p:nvGrpSpPr>
+      <p:grpSpPr>
+        <a:xfrm>
+          <a:off x="0" y="0"/>
+          <a:ext cx="0" cy="0"/>
+          <a:chOff x="0" y="0"/>
+          <a:chExt cx="0" cy="0"/>
+        </a:xfrm>
+      </p:grpSpPr>
+      <p:sp>
+        <p:nvSpPr>
+          <p:cNvPr id="4" name="テキスト ボックス 3">
+            <a:extLst>
+              <a:ext uri="{FF2B5EF4-FFF2-40B4-BE49-F238E27FC236}">
+                <a16:creationId xmlns:a16="http://schemas.microsoft.com/office/drawing/2014/main" id="{5A13BF46-B8C5-48AA-8308-C9ECFF431A18}"/>
+              </a:ext>
+            </a:extLst>
+          </p:cNvPr>
+          <p:cNvSpPr txBox="1"/>
+          <p:nvPr/>
+        </p:nvSpPr>
+        <p:spPr>
+          <a:xfrm>
+            <a:off x="567542" y="491954"/>
+            <a:ext cx="1943161" cy="584775"/>
+          </a:xfrm>
+          <a:prstGeom prst="rect">
+            <a:avLst/>
+          </a:prstGeom>
+          <a:noFill/>
+        </p:spPr>
+        <p:txBody>
+          <a:bodyPr wrap="none" rtlCol="0">
+            <a:spAutoFit/>
+          </a:bodyPr>
+          <a:lstStyle/>
+          <a:p>
+            <a:r>
+              <a:rPr kumimoji="1" lang="ja-JP" altLang="en-US" sz="3200" b="1" u="sng" dirty="0"/>
+              <a:t>弾丸 補足</a:t>
+            </a:r>
+          </a:p>
+        </p:txBody>
+      </p:sp>
+      <p:sp>
+        <p:nvSpPr>
+          <p:cNvPr id="6" name="テキスト ボックス 5">
+            <a:extLst>
+              <a:ext uri="{FF2B5EF4-FFF2-40B4-BE49-F238E27FC236}">
+                <a16:creationId xmlns:a16="http://schemas.microsoft.com/office/drawing/2014/main" id="{55830AD6-028B-4C4E-80BF-B70DFC1C3A46}"/>
+              </a:ext>
+            </a:extLst>
+          </p:cNvPr>
+          <p:cNvSpPr txBox="1"/>
+          <p:nvPr/>
+        </p:nvSpPr>
+        <p:spPr>
+          <a:xfrm>
+            <a:off x="567542" y="1216429"/>
+            <a:ext cx="9417963" cy="461665"/>
+          </a:xfrm>
+          <a:prstGeom prst="rect">
+            <a:avLst/>
+          </a:prstGeom>
+          <a:noFill/>
+        </p:spPr>
+        <p:txBody>
+          <a:bodyPr wrap="none" rtlCol="0">
+            <a:spAutoFit/>
+          </a:bodyPr>
+          <a:lstStyle/>
+          <a:p>
+            <a:r>
+              <a:rPr lang="ja-JP" altLang="en-US" sz="2400" dirty="0"/>
+              <a:t>同じ画像を大量に出す場合は</a:t>
+            </a:r>
+            <a:r>
+              <a:rPr lang="ja-JP" altLang="en-US" sz="2400" b="1" dirty="0">
+                <a:solidFill>
+                  <a:srgbClr val="FF0000"/>
+                </a:solidFill>
+              </a:rPr>
+              <a:t>画像ハンドルを使いまわしましょう。</a:t>
+            </a:r>
+            <a:endParaRPr lang="en-US" altLang="ja-JP" sz="2400" b="1" dirty="0">
+              <a:solidFill>
+                <a:srgbClr val="FF0000"/>
+              </a:solidFill>
+            </a:endParaRPr>
+          </a:p>
+        </p:txBody>
+      </p:sp>
+      <p:pic>
+        <p:nvPicPr>
+          <p:cNvPr id="5" name="図 4">
+            <a:extLst>
+              <a:ext uri="{FF2B5EF4-FFF2-40B4-BE49-F238E27FC236}">
+                <a16:creationId xmlns:a16="http://schemas.microsoft.com/office/drawing/2014/main" id="{3D2A13D3-DF8A-4F66-AA4C-B58817912A9F}"/>
+              </a:ext>
+            </a:extLst>
+          </p:cNvPr>
+          <p:cNvPicPr>
+            <a:picLocks noChangeAspect="1"/>
+          </p:cNvPicPr>
+          <p:nvPr/>
+        </p:nvPicPr>
+        <p:blipFill>
+          <a:blip r:embed="rId2"/>
+          <a:stretch>
+            <a:fillRect/>
+          </a:stretch>
+        </p:blipFill>
+        <p:spPr>
+          <a:xfrm>
+            <a:off x="567542" y="1817794"/>
+            <a:ext cx="8173591" cy="1286054"/>
+          </a:xfrm>
+          <a:prstGeom prst="rect">
+            <a:avLst/>
+          </a:prstGeom>
+        </p:spPr>
+      </p:pic>
+      <p:sp>
+        <p:nvSpPr>
+          <p:cNvPr id="7" name="テキスト ボックス 6">
+            <a:extLst>
+              <a:ext uri="{FF2B5EF4-FFF2-40B4-BE49-F238E27FC236}">
+                <a16:creationId xmlns:a16="http://schemas.microsoft.com/office/drawing/2014/main" id="{2DE9791E-4631-41B1-8044-A76DE9DD268A}"/>
+              </a:ext>
+            </a:extLst>
+          </p:cNvPr>
+          <p:cNvSpPr txBox="1"/>
+          <p:nvPr/>
+        </p:nvSpPr>
+        <p:spPr>
+          <a:xfrm>
+            <a:off x="8481830" y="2332784"/>
+            <a:ext cx="3570208" cy="461665"/>
+          </a:xfrm>
+          <a:prstGeom prst="rect">
+            <a:avLst/>
+          </a:prstGeom>
+          <a:noFill/>
+        </p:spPr>
+        <p:txBody>
+          <a:bodyPr wrap="none" rtlCol="0">
+            <a:spAutoFit/>
+          </a:bodyPr>
+          <a:lstStyle/>
+          <a:p>
+            <a:r>
+              <a:rPr lang="ja-JP" altLang="en-US" sz="2400" dirty="0"/>
+              <a:t>１回だけロードして。。</a:t>
+            </a:r>
+            <a:endParaRPr lang="en-US" altLang="ja-JP" sz="2400" b="1" dirty="0">
+              <a:solidFill>
+                <a:srgbClr val="FF0000"/>
+              </a:solidFill>
+            </a:endParaRPr>
+          </a:p>
+        </p:txBody>
+      </p:sp>
+      <p:pic>
+        <p:nvPicPr>
+          <p:cNvPr id="9" name="図 8">
+            <a:extLst>
+              <a:ext uri="{FF2B5EF4-FFF2-40B4-BE49-F238E27FC236}">
+                <a16:creationId xmlns:a16="http://schemas.microsoft.com/office/drawing/2014/main" id="{018B36CD-A9BC-464B-AD9A-373AF591C2D7}"/>
+              </a:ext>
+            </a:extLst>
+          </p:cNvPr>
+          <p:cNvPicPr>
+            <a:picLocks noChangeAspect="1"/>
+          </p:cNvPicPr>
+          <p:nvPr/>
+        </p:nvPicPr>
+        <p:blipFill>
+          <a:blip r:embed="rId3"/>
+          <a:stretch>
+            <a:fillRect/>
+          </a:stretch>
+        </p:blipFill>
+        <p:spPr>
+          <a:xfrm>
+            <a:off x="567542" y="3581797"/>
+            <a:ext cx="6496957" cy="2972215"/>
+          </a:xfrm>
+          <a:prstGeom prst="rect">
+            <a:avLst/>
+          </a:prstGeom>
+        </p:spPr>
+      </p:pic>
+      <p:sp>
+        <p:nvSpPr>
+          <p:cNvPr id="10" name="テキスト ボックス 9">
+            <a:extLst>
+              <a:ext uri="{FF2B5EF4-FFF2-40B4-BE49-F238E27FC236}">
+                <a16:creationId xmlns:a16="http://schemas.microsoft.com/office/drawing/2014/main" id="{E4C36067-AD1E-4BF6-9350-707168DEC087}"/>
+              </a:ext>
+            </a:extLst>
+          </p:cNvPr>
+          <p:cNvSpPr txBox="1"/>
+          <p:nvPr/>
+        </p:nvSpPr>
+        <p:spPr>
+          <a:xfrm>
+            <a:off x="6096000" y="6231610"/>
+            <a:ext cx="4185761" cy="461665"/>
+          </a:xfrm>
+          <a:prstGeom prst="rect">
+            <a:avLst/>
+          </a:prstGeom>
+          <a:noFill/>
+        </p:spPr>
+        <p:txBody>
+          <a:bodyPr wrap="none" rtlCol="0">
+            <a:spAutoFit/>
+          </a:bodyPr>
+          <a:lstStyle/>
+          <a:p>
+            <a:r>
+              <a:rPr lang="ja-JP" altLang="en-US" sz="2400" dirty="0"/>
+              <a:t>１つのハンドルを使いまわす</a:t>
+            </a:r>
+            <a:endParaRPr lang="en-US" altLang="ja-JP" sz="2400" b="1" dirty="0">
+              <a:solidFill>
+                <a:srgbClr val="FF0000"/>
+              </a:solidFill>
+            </a:endParaRPr>
+          </a:p>
+        </p:txBody>
+      </p:sp>
+    </p:spTree>
+    <p:extLst>
+      <p:ext uri="{BB962C8B-B14F-4D97-AF65-F5344CB8AC3E}">
+        <p14:creationId xmlns:p14="http://schemas.microsoft.com/office/powerpoint/2010/main" val="2656372982"/>
+      </p:ext>
+    </p:extLst>
+  </p:cSld>
+  <p:clrMapOvr>
+    <a:masterClrMapping/>
+  </p:clrMapOvr>
+</p:sld>
+</file>
+
 <file path=ppt/slides/slide2.xml><?xml version="1.0" encoding="utf-8"?>
 <p:sld xmlns:a="http://schemas.openxmlformats.org/drawingml/2006/main" xmlns:r="http://schemas.openxmlformats.org/officeDocument/2006/relationships" xmlns:p="http://schemas.openxmlformats.org/presentationml/2006/main">
   <p:cSld>
@@ -4302,10 +5531,808 @@
           </a:prstGeom>
         </p:spPr>
       </p:pic>
+      <p:sp>
+        <p:nvSpPr>
+          <p:cNvPr id="5" name="テキスト ボックス 4">
+            <a:extLst>
+              <a:ext uri="{FF2B5EF4-FFF2-40B4-BE49-F238E27FC236}">
+                <a16:creationId xmlns:a16="http://schemas.microsoft.com/office/drawing/2014/main" id="{EE70C1A4-0727-4568-BB28-FE1CA583FCEC}"/>
+              </a:ext>
+            </a:extLst>
+          </p:cNvPr>
+          <p:cNvSpPr txBox="1"/>
+          <p:nvPr/>
+        </p:nvSpPr>
+        <p:spPr>
+          <a:xfrm>
+            <a:off x="567542" y="4520077"/>
+            <a:ext cx="5968301" cy="461665"/>
+          </a:xfrm>
+          <a:prstGeom prst="rect">
+            <a:avLst/>
+          </a:prstGeom>
+          <a:noFill/>
+        </p:spPr>
+        <p:txBody>
+          <a:bodyPr wrap="none" rtlCol="0">
+            <a:spAutoFit/>
+          </a:bodyPr>
+          <a:lstStyle/>
+          <a:p>
+            <a:r>
+              <a:rPr lang="en-US" altLang="ja-JP" sz="2400" b="1" dirty="0" err="1">
+                <a:solidFill>
+                  <a:srgbClr val="0070C0"/>
+                </a:solidFill>
+              </a:rPr>
+              <a:t>RequestFireBullet</a:t>
+            </a:r>
+            <a:r>
+              <a:rPr lang="ja-JP" altLang="en-US" sz="2400" b="1" dirty="0">
+                <a:solidFill>
+                  <a:srgbClr val="0070C0"/>
+                </a:solidFill>
+              </a:rPr>
+              <a:t>関数</a:t>
+            </a:r>
+            <a:r>
+              <a:rPr lang="ja-JP" altLang="en-US" sz="2400" dirty="0"/>
+              <a:t>に関しては後ほど</a:t>
+            </a:r>
+            <a:endParaRPr lang="en-US" altLang="ja-JP" sz="2400" dirty="0"/>
+          </a:p>
+        </p:txBody>
+      </p:sp>
     </p:spTree>
     <p:extLst>
       <p:ext uri="{BB962C8B-B14F-4D97-AF65-F5344CB8AC3E}">
         <p14:creationId xmlns:p14="http://schemas.microsoft.com/office/powerpoint/2010/main" val="2568313126"/>
+      </p:ext>
+    </p:extLst>
+  </p:cSld>
+  <p:clrMapOvr>
+    <a:masterClrMapping/>
+  </p:clrMapOvr>
+</p:sld>
+</file>
+
+<file path=ppt/slides/slide6.xml><?xml version="1.0" encoding="utf-8"?>
+<p:sld xmlns:a="http://schemas.openxmlformats.org/drawingml/2006/main" xmlns:r="http://schemas.openxmlformats.org/officeDocument/2006/relationships" xmlns:p="http://schemas.openxmlformats.org/presentationml/2006/main">
+  <p:cSld>
+    <p:spTree>
+      <p:nvGrpSpPr>
+        <p:cNvPr id="1" name=""/>
+        <p:cNvGrpSpPr/>
+        <p:nvPr/>
+      </p:nvGrpSpPr>
+      <p:grpSpPr>
+        <a:xfrm>
+          <a:off x="0" y="0"/>
+          <a:ext cx="0" cy="0"/>
+          <a:chOff x="0" y="0"/>
+          <a:chExt cx="0" cy="0"/>
+        </a:xfrm>
+      </p:grpSpPr>
+      <p:sp>
+        <p:nvSpPr>
+          <p:cNvPr id="4" name="テキスト ボックス 3">
+            <a:extLst>
+              <a:ext uri="{FF2B5EF4-FFF2-40B4-BE49-F238E27FC236}">
+                <a16:creationId xmlns:a16="http://schemas.microsoft.com/office/drawing/2014/main" id="{5A13BF46-B8C5-48AA-8308-C9ECFF431A18}"/>
+              </a:ext>
+            </a:extLst>
+          </p:cNvPr>
+          <p:cNvSpPr txBox="1"/>
+          <p:nvPr/>
+        </p:nvSpPr>
+        <p:spPr>
+          <a:xfrm>
+            <a:off x="567542" y="491954"/>
+            <a:ext cx="1005403" cy="584775"/>
+          </a:xfrm>
+          <a:prstGeom prst="rect">
+            <a:avLst/>
+          </a:prstGeom>
+          <a:noFill/>
+        </p:spPr>
+        <p:txBody>
+          <a:bodyPr wrap="none" rtlCol="0">
+            <a:spAutoFit/>
+          </a:bodyPr>
+          <a:lstStyle/>
+          <a:p>
+            <a:r>
+              <a:rPr kumimoji="1" lang="ja-JP" altLang="en-US" sz="3200" b="1" u="sng" dirty="0"/>
+              <a:t>弾丸</a:t>
+            </a:r>
+          </a:p>
+        </p:txBody>
+      </p:sp>
+      <p:sp>
+        <p:nvSpPr>
+          <p:cNvPr id="6" name="テキスト ボックス 5">
+            <a:extLst>
+              <a:ext uri="{FF2B5EF4-FFF2-40B4-BE49-F238E27FC236}">
+                <a16:creationId xmlns:a16="http://schemas.microsoft.com/office/drawing/2014/main" id="{55830AD6-028B-4C4E-80BF-B70DFC1C3A46}"/>
+              </a:ext>
+            </a:extLst>
+          </p:cNvPr>
+          <p:cNvSpPr txBox="1"/>
+          <p:nvPr/>
+        </p:nvSpPr>
+        <p:spPr>
+          <a:xfrm>
+            <a:off x="567542" y="1216429"/>
+            <a:ext cx="6647974" cy="830997"/>
+          </a:xfrm>
+          <a:prstGeom prst="rect">
+            <a:avLst/>
+          </a:prstGeom>
+          <a:noFill/>
+        </p:spPr>
+        <p:txBody>
+          <a:bodyPr wrap="none" rtlCol="0">
+            <a:spAutoFit/>
+          </a:bodyPr>
+          <a:lstStyle/>
+          <a:p>
+            <a:r>
+              <a:rPr lang="ja-JP" altLang="en-US" sz="2400" dirty="0"/>
+              <a:t>続けて弾丸そのもののプログラムを作ります。</a:t>
+            </a:r>
+            <a:endParaRPr lang="en-US" altLang="ja-JP" sz="2400" dirty="0"/>
+          </a:p>
+          <a:p>
+            <a:r>
+              <a:rPr lang="en-US" altLang="ja-JP" sz="2400" b="1" dirty="0">
+                <a:solidFill>
+                  <a:srgbClr val="FF0000"/>
+                </a:solidFill>
+              </a:rPr>
+              <a:t>Bullet.cpp</a:t>
+            </a:r>
+            <a:r>
+              <a:rPr lang="ja-JP" altLang="en-US" sz="2400" dirty="0"/>
+              <a:t>を開きましょう。</a:t>
+            </a:r>
+            <a:endParaRPr lang="en-US" altLang="ja-JP" sz="2400" dirty="0"/>
+          </a:p>
+        </p:txBody>
+      </p:sp>
+      <p:pic>
+        <p:nvPicPr>
+          <p:cNvPr id="7" name="図 6">
+            <a:extLst>
+              <a:ext uri="{FF2B5EF4-FFF2-40B4-BE49-F238E27FC236}">
+                <a16:creationId xmlns:a16="http://schemas.microsoft.com/office/drawing/2014/main" id="{B09762A3-D523-4651-A488-30CAF4563732}"/>
+              </a:ext>
+            </a:extLst>
+          </p:cNvPr>
+          <p:cNvPicPr>
+            <a:picLocks noChangeAspect="1"/>
+          </p:cNvPicPr>
+          <p:nvPr/>
+        </p:nvPicPr>
+        <p:blipFill>
+          <a:blip r:embed="rId2"/>
+          <a:stretch>
+            <a:fillRect/>
+          </a:stretch>
+        </p:blipFill>
+        <p:spPr>
+          <a:xfrm>
+            <a:off x="567542" y="2187126"/>
+            <a:ext cx="7893286" cy="4242641"/>
+          </a:xfrm>
+          <a:prstGeom prst="rect">
+            <a:avLst/>
+          </a:prstGeom>
+        </p:spPr>
+      </p:pic>
+      <p:sp>
+        <p:nvSpPr>
+          <p:cNvPr id="8" name="テキスト ボックス 7">
+            <a:extLst>
+              <a:ext uri="{FF2B5EF4-FFF2-40B4-BE49-F238E27FC236}">
+                <a16:creationId xmlns:a16="http://schemas.microsoft.com/office/drawing/2014/main" id="{DD1BF3F0-F524-4051-B6D7-339F5BF04397}"/>
+              </a:ext>
+            </a:extLst>
+          </p:cNvPr>
+          <p:cNvSpPr txBox="1"/>
+          <p:nvPr/>
+        </p:nvSpPr>
+        <p:spPr>
+          <a:xfrm>
+            <a:off x="8460828" y="5738470"/>
+            <a:ext cx="3807453" cy="830997"/>
+          </a:xfrm>
+          <a:prstGeom prst="rect">
+            <a:avLst/>
+          </a:prstGeom>
+          <a:noFill/>
+        </p:spPr>
+        <p:txBody>
+          <a:bodyPr wrap="none" rtlCol="0">
+            <a:spAutoFit/>
+          </a:bodyPr>
+          <a:lstStyle/>
+          <a:p>
+            <a:r>
+              <a:rPr lang="en-US" altLang="ja-JP" sz="2400" b="1" dirty="0">
+                <a:solidFill>
+                  <a:srgbClr val="00B050"/>
+                </a:solidFill>
+              </a:rPr>
+              <a:t>MEMO</a:t>
+            </a:r>
+          </a:p>
+          <a:p>
+            <a:r>
+              <a:rPr lang="en-US" altLang="ja-JP" sz="2400" b="1" dirty="0" err="1">
+                <a:solidFill>
+                  <a:srgbClr val="FF0000"/>
+                </a:solidFill>
+              </a:rPr>
+              <a:t>Bullet.h</a:t>
+            </a:r>
+            <a:r>
+              <a:rPr lang="ja-JP" altLang="en-US" sz="2400" dirty="0"/>
+              <a:t>を確認しておこう</a:t>
+            </a:r>
+            <a:endParaRPr lang="en-US" altLang="ja-JP" sz="2400" dirty="0"/>
+          </a:p>
+        </p:txBody>
+      </p:sp>
+    </p:spTree>
+    <p:extLst>
+      <p:ext uri="{BB962C8B-B14F-4D97-AF65-F5344CB8AC3E}">
+        <p14:creationId xmlns:p14="http://schemas.microsoft.com/office/powerpoint/2010/main" val="3220421519"/>
+      </p:ext>
+    </p:extLst>
+  </p:cSld>
+  <p:clrMapOvr>
+    <a:masterClrMapping/>
+  </p:clrMapOvr>
+</p:sld>
+</file>
+
+<file path=ppt/slides/slide7.xml><?xml version="1.0" encoding="utf-8"?>
+<p:sld xmlns:a="http://schemas.openxmlformats.org/drawingml/2006/main" xmlns:r="http://schemas.openxmlformats.org/officeDocument/2006/relationships" xmlns:p="http://schemas.openxmlformats.org/presentationml/2006/main">
+  <p:cSld>
+    <p:spTree>
+      <p:nvGrpSpPr>
+        <p:cNvPr id="1" name=""/>
+        <p:cNvGrpSpPr/>
+        <p:nvPr/>
+      </p:nvGrpSpPr>
+      <p:grpSpPr>
+        <a:xfrm>
+          <a:off x="0" y="0"/>
+          <a:ext cx="0" cy="0"/>
+          <a:chOff x="0" y="0"/>
+          <a:chExt cx="0" cy="0"/>
+        </a:xfrm>
+      </p:grpSpPr>
+      <p:sp>
+        <p:nvSpPr>
+          <p:cNvPr id="4" name="テキスト ボックス 3">
+            <a:extLst>
+              <a:ext uri="{FF2B5EF4-FFF2-40B4-BE49-F238E27FC236}">
+                <a16:creationId xmlns:a16="http://schemas.microsoft.com/office/drawing/2014/main" id="{5A13BF46-B8C5-48AA-8308-C9ECFF431A18}"/>
+              </a:ext>
+            </a:extLst>
+          </p:cNvPr>
+          <p:cNvSpPr txBox="1"/>
+          <p:nvPr/>
+        </p:nvSpPr>
+        <p:spPr>
+          <a:xfrm>
+            <a:off x="567542" y="491954"/>
+            <a:ext cx="1005403" cy="584775"/>
+          </a:xfrm>
+          <a:prstGeom prst="rect">
+            <a:avLst/>
+          </a:prstGeom>
+          <a:noFill/>
+        </p:spPr>
+        <p:txBody>
+          <a:bodyPr wrap="none" rtlCol="0">
+            <a:spAutoFit/>
+          </a:bodyPr>
+          <a:lstStyle/>
+          <a:p>
+            <a:r>
+              <a:rPr kumimoji="1" lang="ja-JP" altLang="en-US" sz="3200" b="1" u="sng" dirty="0"/>
+              <a:t>弾丸</a:t>
+            </a:r>
+          </a:p>
+        </p:txBody>
+      </p:sp>
+      <p:sp>
+        <p:nvSpPr>
+          <p:cNvPr id="6" name="テキスト ボックス 5">
+            <a:extLst>
+              <a:ext uri="{FF2B5EF4-FFF2-40B4-BE49-F238E27FC236}">
+                <a16:creationId xmlns:a16="http://schemas.microsoft.com/office/drawing/2014/main" id="{55830AD6-028B-4C4E-80BF-B70DFC1C3A46}"/>
+              </a:ext>
+            </a:extLst>
+          </p:cNvPr>
+          <p:cNvSpPr txBox="1"/>
+          <p:nvPr/>
+        </p:nvSpPr>
+        <p:spPr>
+          <a:xfrm>
+            <a:off x="567542" y="1216429"/>
+            <a:ext cx="9110186" cy="1200329"/>
+          </a:xfrm>
+          <a:prstGeom prst="rect">
+            <a:avLst/>
+          </a:prstGeom>
+          <a:noFill/>
+        </p:spPr>
+        <p:txBody>
+          <a:bodyPr wrap="none" rtlCol="0">
+            <a:spAutoFit/>
+          </a:bodyPr>
+          <a:lstStyle/>
+          <a:p>
+            <a:r>
+              <a:rPr lang="ja-JP" altLang="en-US" sz="2400" dirty="0"/>
+              <a:t>弾丸は画面にたくさん表示されますが、</a:t>
+            </a:r>
+            <a:endParaRPr lang="en-US" altLang="ja-JP" sz="2400" dirty="0"/>
+          </a:p>
+          <a:p>
+            <a:r>
+              <a:rPr lang="ja-JP" altLang="en-US" sz="2400" b="1" dirty="0">
+                <a:solidFill>
+                  <a:srgbClr val="FF0000"/>
+                </a:solidFill>
+              </a:rPr>
+              <a:t>いくつ画面に表示されるかは状況次第</a:t>
+            </a:r>
+            <a:r>
+              <a:rPr lang="ja-JP" altLang="en-US" sz="2400" dirty="0"/>
+              <a:t>だと思います。</a:t>
+            </a:r>
+            <a:endParaRPr lang="en-US" altLang="ja-JP" sz="2400" dirty="0"/>
+          </a:p>
+          <a:p>
+            <a:r>
+              <a:rPr lang="ja-JP" altLang="en-US" sz="2400" dirty="0"/>
+              <a:t>このような場合は、</a:t>
+            </a:r>
+            <a:r>
+              <a:rPr lang="ja-JP" altLang="en-US" sz="2400" b="1" dirty="0">
+                <a:solidFill>
+                  <a:srgbClr val="FF0000"/>
+                </a:solidFill>
+              </a:rPr>
+              <a:t>予想される最大数で配列を用意</a:t>
+            </a:r>
+            <a:r>
+              <a:rPr lang="ja-JP" altLang="en-US" sz="2400" dirty="0"/>
+              <a:t>しましょう。</a:t>
+            </a:r>
+            <a:endParaRPr lang="en-US" altLang="ja-JP" sz="2400" dirty="0"/>
+          </a:p>
+        </p:txBody>
+      </p:sp>
+      <p:pic>
+        <p:nvPicPr>
+          <p:cNvPr id="3" name="図 2">
+            <a:extLst>
+              <a:ext uri="{FF2B5EF4-FFF2-40B4-BE49-F238E27FC236}">
+                <a16:creationId xmlns:a16="http://schemas.microsoft.com/office/drawing/2014/main" id="{E1340A95-ACDF-4434-B52F-DD8763DAF02A}"/>
+              </a:ext>
+            </a:extLst>
+          </p:cNvPr>
+          <p:cNvPicPr>
+            <a:picLocks noChangeAspect="1"/>
+          </p:cNvPicPr>
+          <p:nvPr/>
+        </p:nvPicPr>
+        <p:blipFill>
+          <a:blip r:embed="rId2"/>
+          <a:stretch>
+            <a:fillRect/>
+          </a:stretch>
+        </p:blipFill>
+        <p:spPr>
+          <a:xfrm>
+            <a:off x="567541" y="2556458"/>
+            <a:ext cx="10830181" cy="1111652"/>
+          </a:xfrm>
+          <a:prstGeom prst="rect">
+            <a:avLst/>
+          </a:prstGeom>
+        </p:spPr>
+      </p:pic>
+      <p:sp>
+        <p:nvSpPr>
+          <p:cNvPr id="8" name="テキスト ボックス 7">
+            <a:extLst>
+              <a:ext uri="{FF2B5EF4-FFF2-40B4-BE49-F238E27FC236}">
+                <a16:creationId xmlns:a16="http://schemas.microsoft.com/office/drawing/2014/main" id="{1F27D444-832F-43BC-9170-A2E68E66711C}"/>
+              </a:ext>
+            </a:extLst>
+          </p:cNvPr>
+          <p:cNvSpPr txBox="1"/>
+          <p:nvPr/>
+        </p:nvSpPr>
+        <p:spPr>
+          <a:xfrm>
+            <a:off x="567542" y="3807810"/>
+            <a:ext cx="8494633" cy="1569660"/>
+          </a:xfrm>
+          <a:prstGeom prst="rect">
+            <a:avLst/>
+          </a:prstGeom>
+          <a:noFill/>
+        </p:spPr>
+        <p:txBody>
+          <a:bodyPr wrap="none" rtlCol="0">
+            <a:spAutoFit/>
+          </a:bodyPr>
+          <a:lstStyle/>
+          <a:p>
+            <a:r>
+              <a:rPr lang="en-US" altLang="ja-JP" sz="2400" b="1" dirty="0">
+                <a:solidFill>
+                  <a:srgbClr val="00B050"/>
+                </a:solidFill>
+              </a:rPr>
+              <a:t>MEMO</a:t>
+            </a:r>
+          </a:p>
+          <a:p>
+            <a:r>
+              <a:rPr lang="en-US" altLang="ja-JP" sz="2400" b="1" dirty="0">
+                <a:solidFill>
+                  <a:srgbClr val="7030A0"/>
+                </a:solidFill>
+              </a:rPr>
+              <a:t>BULLET_MAX </a:t>
+            </a:r>
+            <a:r>
+              <a:rPr lang="en-US" altLang="ja-JP" sz="2400" dirty="0"/>
+              <a:t>(128) </a:t>
+            </a:r>
+            <a:r>
+              <a:rPr lang="ja-JP" altLang="en-US" sz="2400" dirty="0"/>
+              <a:t>で定義してます。</a:t>
+            </a:r>
+            <a:endParaRPr lang="en-US" altLang="ja-JP" sz="2400" dirty="0"/>
+          </a:p>
+          <a:p>
+            <a:r>
+              <a:rPr lang="ja-JP" altLang="en-US" sz="2400" dirty="0"/>
+              <a:t>このように</a:t>
+            </a:r>
+            <a:r>
+              <a:rPr lang="en-US" altLang="ja-JP" sz="2400" dirty="0"/>
+              <a:t>2</a:t>
+            </a:r>
+            <a:r>
+              <a:rPr lang="ja-JP" altLang="en-US" sz="2400" dirty="0"/>
+              <a:t>のべき乗にすることが一般的です。</a:t>
+            </a:r>
+            <a:endParaRPr lang="en-US" altLang="ja-JP" sz="2400" dirty="0"/>
+          </a:p>
+          <a:p>
+            <a:r>
+              <a:rPr lang="ja-JP" altLang="en-US" sz="2400" dirty="0"/>
+              <a:t>（コンピューターにとって２のべき乗はキリが良いため）</a:t>
+            </a:r>
+            <a:endParaRPr lang="en-US" altLang="ja-JP" sz="2400" dirty="0"/>
+          </a:p>
+        </p:txBody>
+      </p:sp>
+    </p:spTree>
+    <p:extLst>
+      <p:ext uri="{BB962C8B-B14F-4D97-AF65-F5344CB8AC3E}">
+        <p14:creationId xmlns:p14="http://schemas.microsoft.com/office/powerpoint/2010/main" val="2483717074"/>
+      </p:ext>
+    </p:extLst>
+  </p:cSld>
+  <p:clrMapOvr>
+    <a:masterClrMapping/>
+  </p:clrMapOvr>
+</p:sld>
+</file>
+
+<file path=ppt/slides/slide8.xml><?xml version="1.0" encoding="utf-8"?>
+<p:sld xmlns:a="http://schemas.openxmlformats.org/drawingml/2006/main" xmlns:r="http://schemas.openxmlformats.org/officeDocument/2006/relationships" xmlns:p="http://schemas.openxmlformats.org/presentationml/2006/main">
+  <p:cSld>
+    <p:spTree>
+      <p:nvGrpSpPr>
+        <p:cNvPr id="1" name=""/>
+        <p:cNvGrpSpPr/>
+        <p:nvPr/>
+      </p:nvGrpSpPr>
+      <p:grpSpPr>
+        <a:xfrm>
+          <a:off x="0" y="0"/>
+          <a:ext cx="0" cy="0"/>
+          <a:chOff x="0" y="0"/>
+          <a:chExt cx="0" cy="0"/>
+        </a:xfrm>
+      </p:grpSpPr>
+      <p:sp>
+        <p:nvSpPr>
+          <p:cNvPr id="4" name="テキスト ボックス 3">
+            <a:extLst>
+              <a:ext uri="{FF2B5EF4-FFF2-40B4-BE49-F238E27FC236}">
+                <a16:creationId xmlns:a16="http://schemas.microsoft.com/office/drawing/2014/main" id="{5A13BF46-B8C5-48AA-8308-C9ECFF431A18}"/>
+              </a:ext>
+            </a:extLst>
+          </p:cNvPr>
+          <p:cNvSpPr txBox="1"/>
+          <p:nvPr/>
+        </p:nvSpPr>
+        <p:spPr>
+          <a:xfrm>
+            <a:off x="567542" y="491954"/>
+            <a:ext cx="1005403" cy="584775"/>
+          </a:xfrm>
+          <a:prstGeom prst="rect">
+            <a:avLst/>
+          </a:prstGeom>
+          <a:noFill/>
+        </p:spPr>
+        <p:txBody>
+          <a:bodyPr wrap="none" rtlCol="0">
+            <a:spAutoFit/>
+          </a:bodyPr>
+          <a:lstStyle/>
+          <a:p>
+            <a:r>
+              <a:rPr kumimoji="1" lang="ja-JP" altLang="en-US" sz="3200" b="1" u="sng" dirty="0"/>
+              <a:t>弾丸</a:t>
+            </a:r>
+          </a:p>
+        </p:txBody>
+      </p:sp>
+      <p:sp>
+        <p:nvSpPr>
+          <p:cNvPr id="6" name="テキスト ボックス 5">
+            <a:extLst>
+              <a:ext uri="{FF2B5EF4-FFF2-40B4-BE49-F238E27FC236}">
+                <a16:creationId xmlns:a16="http://schemas.microsoft.com/office/drawing/2014/main" id="{55830AD6-028B-4C4E-80BF-B70DFC1C3A46}"/>
+              </a:ext>
+            </a:extLst>
+          </p:cNvPr>
+          <p:cNvSpPr txBox="1"/>
+          <p:nvPr/>
+        </p:nvSpPr>
+        <p:spPr>
+          <a:xfrm>
+            <a:off x="567542" y="1216429"/>
+            <a:ext cx="6340197" cy="830997"/>
+          </a:xfrm>
+          <a:prstGeom prst="rect">
+            <a:avLst/>
+          </a:prstGeom>
+          <a:noFill/>
+        </p:spPr>
+        <p:txBody>
+          <a:bodyPr wrap="none" rtlCol="0">
+            <a:spAutoFit/>
+          </a:bodyPr>
+          <a:lstStyle/>
+          <a:p>
+            <a:r>
+              <a:rPr lang="en-US" altLang="ja-JP" sz="2400" b="1" dirty="0">
+                <a:solidFill>
+                  <a:srgbClr val="0070C0"/>
+                </a:solidFill>
+              </a:rPr>
+              <a:t>Step</a:t>
+            </a:r>
+            <a:r>
+              <a:rPr lang="ja-JP" altLang="en-US" sz="2400" b="1" dirty="0">
+                <a:solidFill>
+                  <a:srgbClr val="0070C0"/>
+                </a:solidFill>
+              </a:rPr>
+              <a:t>関数</a:t>
+            </a:r>
+            <a:r>
+              <a:rPr lang="ja-JP" altLang="en-US" sz="2400" dirty="0"/>
+              <a:t>では寿命処理を書きます。</a:t>
+            </a:r>
+            <a:endParaRPr lang="en-US" altLang="ja-JP" sz="2400" dirty="0"/>
+          </a:p>
+          <a:p>
+            <a:r>
+              <a:rPr lang="ja-JP" altLang="en-US" sz="2400" dirty="0"/>
+              <a:t>発射して一定時間後に消えるようにします。</a:t>
+            </a:r>
+            <a:endParaRPr lang="en-US" altLang="ja-JP" sz="2400" dirty="0"/>
+          </a:p>
+        </p:txBody>
+      </p:sp>
+      <p:pic>
+        <p:nvPicPr>
+          <p:cNvPr id="5" name="図 4">
+            <a:extLst>
+              <a:ext uri="{FF2B5EF4-FFF2-40B4-BE49-F238E27FC236}">
+                <a16:creationId xmlns:a16="http://schemas.microsoft.com/office/drawing/2014/main" id="{827ECD50-5848-410A-B64D-8872D9E8282C}"/>
+              </a:ext>
+            </a:extLst>
+          </p:cNvPr>
+          <p:cNvPicPr>
+            <a:picLocks noChangeAspect="1"/>
+          </p:cNvPicPr>
+          <p:nvPr/>
+        </p:nvPicPr>
+        <p:blipFill>
+          <a:blip r:embed="rId2"/>
+          <a:stretch>
+            <a:fillRect/>
+          </a:stretch>
+        </p:blipFill>
+        <p:spPr>
+          <a:xfrm>
+            <a:off x="567542" y="2187126"/>
+            <a:ext cx="8229548" cy="3982446"/>
+          </a:xfrm>
+          <a:prstGeom prst="rect">
+            <a:avLst/>
+          </a:prstGeom>
+        </p:spPr>
+      </p:pic>
+    </p:spTree>
+    <p:extLst>
+      <p:ext uri="{BB962C8B-B14F-4D97-AF65-F5344CB8AC3E}">
+        <p14:creationId xmlns:p14="http://schemas.microsoft.com/office/powerpoint/2010/main" val="2036563910"/>
+      </p:ext>
+    </p:extLst>
+  </p:cSld>
+  <p:clrMapOvr>
+    <a:masterClrMapping/>
+  </p:clrMapOvr>
+</p:sld>
+</file>
+
+<file path=ppt/slides/slide9.xml><?xml version="1.0" encoding="utf-8"?>
+<p:sld xmlns:a="http://schemas.openxmlformats.org/drawingml/2006/main" xmlns:r="http://schemas.openxmlformats.org/officeDocument/2006/relationships" xmlns:p="http://schemas.openxmlformats.org/presentationml/2006/main">
+  <p:cSld>
+    <p:spTree>
+      <p:nvGrpSpPr>
+        <p:cNvPr id="1" name=""/>
+        <p:cNvGrpSpPr/>
+        <p:nvPr/>
+      </p:nvGrpSpPr>
+      <p:grpSpPr>
+        <a:xfrm>
+          <a:off x="0" y="0"/>
+          <a:ext cx="0" cy="0"/>
+          <a:chOff x="0" y="0"/>
+          <a:chExt cx="0" cy="0"/>
+        </a:xfrm>
+      </p:grpSpPr>
+      <p:sp>
+        <p:nvSpPr>
+          <p:cNvPr id="4" name="テキスト ボックス 3">
+            <a:extLst>
+              <a:ext uri="{FF2B5EF4-FFF2-40B4-BE49-F238E27FC236}">
+                <a16:creationId xmlns:a16="http://schemas.microsoft.com/office/drawing/2014/main" id="{5A13BF46-B8C5-48AA-8308-C9ECFF431A18}"/>
+              </a:ext>
+            </a:extLst>
+          </p:cNvPr>
+          <p:cNvSpPr txBox="1"/>
+          <p:nvPr/>
+        </p:nvSpPr>
+        <p:spPr>
+          <a:xfrm>
+            <a:off x="567542" y="491954"/>
+            <a:ext cx="1005403" cy="584775"/>
+          </a:xfrm>
+          <a:prstGeom prst="rect">
+            <a:avLst/>
+          </a:prstGeom>
+          <a:noFill/>
+        </p:spPr>
+        <p:txBody>
+          <a:bodyPr wrap="none" rtlCol="0">
+            <a:spAutoFit/>
+          </a:bodyPr>
+          <a:lstStyle/>
+          <a:p>
+            <a:r>
+              <a:rPr kumimoji="1" lang="ja-JP" altLang="en-US" sz="3200" b="1" u="sng" dirty="0"/>
+              <a:t>弾丸</a:t>
+            </a:r>
+          </a:p>
+        </p:txBody>
+      </p:sp>
+      <p:sp>
+        <p:nvSpPr>
+          <p:cNvPr id="6" name="テキスト ボックス 5">
+            <a:extLst>
+              <a:ext uri="{FF2B5EF4-FFF2-40B4-BE49-F238E27FC236}">
+                <a16:creationId xmlns:a16="http://schemas.microsoft.com/office/drawing/2014/main" id="{55830AD6-028B-4C4E-80BF-B70DFC1C3A46}"/>
+              </a:ext>
+            </a:extLst>
+          </p:cNvPr>
+          <p:cNvSpPr txBox="1"/>
+          <p:nvPr/>
+        </p:nvSpPr>
+        <p:spPr>
+          <a:xfrm>
+            <a:off x="567542" y="1216429"/>
+            <a:ext cx="6817892" cy="461665"/>
+          </a:xfrm>
+          <a:prstGeom prst="rect">
+            <a:avLst/>
+          </a:prstGeom>
+          <a:noFill/>
+        </p:spPr>
+        <p:txBody>
+          <a:bodyPr wrap="none" rtlCol="0">
+            <a:spAutoFit/>
+          </a:bodyPr>
+          <a:lstStyle/>
+          <a:p>
+            <a:r>
+              <a:rPr lang="en-US" altLang="ja-JP" sz="2400" b="1" dirty="0">
+                <a:solidFill>
+                  <a:srgbClr val="0070C0"/>
+                </a:solidFill>
+              </a:rPr>
+              <a:t>Update</a:t>
+            </a:r>
+            <a:r>
+              <a:rPr lang="ja-JP" altLang="en-US" sz="2400" b="1" dirty="0">
+                <a:solidFill>
+                  <a:srgbClr val="0070C0"/>
+                </a:solidFill>
+              </a:rPr>
+              <a:t>関数</a:t>
+            </a:r>
+            <a:r>
+              <a:rPr lang="ja-JP" altLang="en-US" sz="2400" dirty="0"/>
+              <a:t>では移動や死亡の処理を書きます。</a:t>
+            </a:r>
+            <a:endParaRPr lang="en-US" altLang="ja-JP" sz="2400" dirty="0"/>
+          </a:p>
+        </p:txBody>
+      </p:sp>
+      <p:pic>
+        <p:nvPicPr>
+          <p:cNvPr id="3" name="図 2">
+            <a:extLst>
+              <a:ext uri="{FF2B5EF4-FFF2-40B4-BE49-F238E27FC236}">
+                <a16:creationId xmlns:a16="http://schemas.microsoft.com/office/drawing/2014/main" id="{986CD07B-00E1-46C8-9FDE-36BA92DE7D76}"/>
+              </a:ext>
+            </a:extLst>
+          </p:cNvPr>
+          <p:cNvPicPr>
+            <a:picLocks noChangeAspect="1"/>
+          </p:cNvPicPr>
+          <p:nvPr/>
+        </p:nvPicPr>
+        <p:blipFill>
+          <a:blip r:embed="rId2"/>
+          <a:stretch>
+            <a:fillRect/>
+          </a:stretch>
+        </p:blipFill>
+        <p:spPr>
+          <a:xfrm>
+            <a:off x="567542" y="1817794"/>
+            <a:ext cx="6335009" cy="4667901"/>
+          </a:xfrm>
+          <a:prstGeom prst="rect">
+            <a:avLst/>
+          </a:prstGeom>
+        </p:spPr>
+      </p:pic>
+    </p:spTree>
+    <p:extLst>
+      <p:ext uri="{BB962C8B-B14F-4D97-AF65-F5344CB8AC3E}">
+        <p14:creationId xmlns:p14="http://schemas.microsoft.com/office/powerpoint/2010/main" val="626686576"/>
       </p:ext>
     </p:extLst>
   </p:cSld>
